--- a/Intelligent_Customer_Signal_Detector_Deck1.pptx
+++ b/Intelligent_Customer_Signal_Detector_Deck1.pptx
@@ -1187,56 +1187,14 @@
       </p:grpSpPr>
       <p:sp>
         <p:nvSpPr>
-          <p:cNvPr id="2" name="Shape 0"/>
-          <p:cNvSpPr/>
-          <p:nvPr/>
-        </p:nvSpPr>
-        <p:spPr>
-          <a:xfrm>
-            <a:off x="8778240" y="-2011680"/>
-            <a:ext cx="6400800" cy="6400800"/>
-          </a:xfrm>
-          <a:prstGeom prst="ellipse">
-            <a:avLst/>
-          </a:prstGeom>
-          <a:solidFill>
-            <a:srgbClr val="0E7C86">
-              <a:alpha val="20000"/>
-            </a:srgbClr>
-          </a:solidFill>
-        </p:spPr>
-      </p:sp>
-      <p:sp>
-        <p:nvSpPr>
-          <p:cNvPr id="3" name="Shape 1"/>
-          <p:cNvSpPr/>
-          <p:nvPr/>
-        </p:nvSpPr>
-        <p:spPr>
-          <a:xfrm>
-            <a:off x="-2286000" y="4480560"/>
-            <a:ext cx="5486400" cy="5486400"/>
-          </a:xfrm>
-          <a:prstGeom prst="ellipse">
-            <a:avLst/>
-          </a:prstGeom>
-          <a:solidFill>
-            <a:srgbClr val="3FD6BE">
-              <a:alpha val="13000"/>
-            </a:srgbClr>
-          </a:solidFill>
-        </p:spPr>
-      </p:sp>
-      <p:sp>
-        <p:nvSpPr>
-          <p:cNvPr id="4" name="Text 2"/>
-          <p:cNvSpPr/>
-          <p:nvPr/>
-        </p:nvSpPr>
-        <p:spPr>
-          <a:xfrm>
-            <a:off x="548640" y="320040"/>
-            <a:ext cx="5486400" cy="274320"/>
+          <p:cNvPr id="41" name="Text 35"/>
+          <p:cNvSpPr/>
+          <p:nvPr/>
+        </p:nvSpPr>
+        <p:spPr>
+          <a:xfrm>
+            <a:off x="8846820" y="5852160"/>
+            <a:ext cx="2583180" cy="438912"/>
           </a:xfrm>
           <a:prstGeom prst="rect">
             <a:avLst/>
@@ -1251,68 +1209,37 @@
               <a:buNone/>
             </a:pPr>
             <a:r>
-              <a:rPr lang="en-US" sz="1100" b="1" kern="0" spc="200" dirty="0">
+              <a:rPr lang="en-GB" altLang="en-US" sz="1600" b="1" dirty="0">
                 <a:solidFill>
                   <a:srgbClr val="3FD6BE"/>
-                </a:solidFill>
-                <a:latin typeface="Calibri" panose="020F0502020204030204" pitchFamily="34" charset="0"/>
-                <a:ea typeface="Calibri" panose="020F0502020204030204" pitchFamily="34" charset="-122"/>
-                <a:cs typeface="Calibri" panose="020F0502020204030204" pitchFamily="34" charset="-120"/>
-              </a:rPr>
-              <a:t>POC  ·  SLIDE 1 OF 5</a:t>
-            </a:r>
-            <a:endParaRPr lang="en-US" sz="1100" dirty="0"/>
-          </a:p>
-        </p:txBody>
-      </p:sp>
-      <p:sp>
-        <p:nvSpPr>
-          <p:cNvPr id="5" name="Text 3"/>
-          <p:cNvSpPr/>
-          <p:nvPr/>
-        </p:nvSpPr>
-        <p:spPr>
-          <a:xfrm>
-            <a:off x="548640" y="658368"/>
-            <a:ext cx="10515600" cy="822960"/>
-          </a:xfrm>
-          <a:prstGeom prst="rect">
-            <a:avLst/>
-          </a:prstGeom>
-          <a:noFill/>
-        </p:spPr>
-        <p:txBody>
-          <a:bodyPr wrap="square" rtlCol="0" anchor="ctr"/>
-          <a:lstStyle/>
-          <a:p>
-            <a:pPr marL="0" indent="0">
-              <a:buNone/>
-            </a:pPr>
-            <a:r>
-              <a:rPr lang="en-US" sz="3400" b="1" dirty="0">
-                <a:solidFill>
-                  <a:srgbClr val="FFFFFF"/>
                 </a:solidFill>
                 <a:latin typeface="Cambria" panose="02040503050406030204" pitchFamily="34" charset="0"/>
                 <a:ea typeface="Cambria" panose="02040503050406030204" pitchFamily="34" charset="-122"/>
                 <a:cs typeface="Cambria" panose="02040503050406030204" pitchFamily="34" charset="-120"/>
               </a:rPr>
-              <a:t>Intelligent Customer Signal Detector</a:t>
-            </a:r>
-            <a:endParaRPr lang="en-US" sz="3400" dirty="0"/>
-          </a:p>
-        </p:txBody>
-      </p:sp>
-      <p:sp>
-        <p:nvSpPr>
-          <p:cNvPr id="6" name="Text 4"/>
-          <p:cNvSpPr/>
-          <p:nvPr/>
-        </p:nvSpPr>
-        <p:spPr>
-          <a:xfrm>
-            <a:off x="548640" y="1371600"/>
-            <a:ext cx="9144000" cy="411480"/>
+              <a:t>Multiple Data Sources</a:t>
+            </a:r>
+            <a:endParaRPr lang="en-GB" altLang="en-US" sz="1600" b="1" dirty="0">
+              <a:solidFill>
+                <a:srgbClr val="3FD6BE"/>
+              </a:solidFill>
+              <a:latin typeface="Cambria" panose="02040503050406030204" pitchFamily="34" charset="0"/>
+              <a:ea typeface="Cambria" panose="02040503050406030204" pitchFamily="34" charset="-122"/>
+              <a:cs typeface="Cambria" panose="02040503050406030204" pitchFamily="34" charset="-120"/>
+            </a:endParaRPr>
+          </a:p>
+        </p:txBody>
+      </p:sp>
+      <p:sp>
+        <p:nvSpPr>
+          <p:cNvPr id="42" name="Text 36"/>
+          <p:cNvSpPr/>
+          <p:nvPr/>
+        </p:nvSpPr>
+        <p:spPr>
+          <a:xfrm>
+            <a:off x="8846820" y="6263640"/>
+            <a:ext cx="2583180" cy="311150"/>
           </a:xfrm>
           <a:prstGeom prst="rect">
             <a:avLst/>
@@ -1326,8 +1253,34 @@
             <a:pPr marL="0" indent="0">
               <a:buNone/>
             </a:pPr>
-            <a:r>
-              <a:rPr lang="en-US" sz="1600" dirty="0">
+            <a:endParaRPr lang="en-US" altLang="en-GB" sz="900" dirty="0">
+              <a:solidFill>
+                <a:srgbClr val="9FC3C8"/>
+              </a:solidFill>
+              <a:latin typeface="Calibri" panose="020F0502020204030204" pitchFamily="34" charset="0"/>
+              <a:ea typeface="Calibri" panose="020F0502020204030204" pitchFamily="34" charset="-122"/>
+              <a:cs typeface="Calibri" panose="020F0502020204030204" pitchFamily="34" charset="-120"/>
+            </a:endParaRPr>
+          </a:p>
+          <a:p>
+            <a:pPr marL="0" indent="0">
+              <a:buNone/>
+            </a:pPr>
+            <a:endParaRPr lang="en-US" altLang="en-GB" sz="900" dirty="0">
+              <a:solidFill>
+                <a:srgbClr val="9FC3C8"/>
+              </a:solidFill>
+              <a:latin typeface="Calibri" panose="020F0502020204030204" pitchFamily="34" charset="0"/>
+              <a:ea typeface="Calibri" panose="020F0502020204030204" pitchFamily="34" charset="-122"/>
+              <a:cs typeface="Calibri" panose="020F0502020204030204" pitchFamily="34" charset="-120"/>
+            </a:endParaRPr>
+          </a:p>
+          <a:p>
+            <a:pPr marL="0" indent="0">
+              <a:buNone/>
+            </a:pPr>
+            <a:r>
+              <a:rPr lang="en-US" altLang="en-GB" sz="900" dirty="0">
                 <a:solidFill>
                   <a:srgbClr val="9FC3C8"/>
                 </a:solidFill>
@@ -1335,22 +1288,66 @@
                 <a:ea typeface="Calibri" panose="020F0502020204030204" pitchFamily="34" charset="-122"/>
                 <a:cs typeface="Calibri" panose="020F0502020204030204" pitchFamily="34" charset="-120"/>
               </a:rPr>
-              <a:t>Problem Understanding &amp; Objective</a:t>
-            </a:r>
-            <a:endParaRPr lang="en-US" sz="1600" dirty="0"/>
-          </a:p>
-        </p:txBody>
-      </p:sp>
-      <p:sp>
-        <p:nvSpPr>
-          <p:cNvPr id="7" name="Text 5"/>
-          <p:cNvSpPr/>
-          <p:nvPr/>
-        </p:nvSpPr>
-        <p:spPr>
-          <a:xfrm>
-            <a:off x="548640" y="1965960"/>
-            <a:ext cx="5486400" cy="365760"/>
+              <a:t>• Customer Chat Logs • Payment Billings • </a:t>
+            </a:r>
+            <a:r>
+              <a:rPr lang="en-GB" altLang="en-US" sz="900" dirty="0">
+                <a:solidFill>
+                  <a:srgbClr val="9FC3C8"/>
+                </a:solidFill>
+                <a:latin typeface="Calibri" panose="020F0502020204030204" pitchFamily="34" charset="0"/>
+                <a:ea typeface="Calibri" panose="020F0502020204030204" pitchFamily="34" charset="-122"/>
+                <a:cs typeface="Calibri" panose="020F0502020204030204" pitchFamily="34" charset="-120"/>
+              </a:rPr>
+              <a:t> Services</a:t>
+            </a:r>
+            <a:endParaRPr lang="en-US" altLang="en-GB" sz="900" dirty="0">
+              <a:solidFill>
+                <a:srgbClr val="9FC3C8"/>
+              </a:solidFill>
+              <a:latin typeface="Calibri" panose="020F0502020204030204" pitchFamily="34" charset="0"/>
+              <a:ea typeface="Calibri" panose="020F0502020204030204" pitchFamily="34" charset="-122"/>
+              <a:cs typeface="Calibri" panose="020F0502020204030204" pitchFamily="34" charset="-120"/>
+            </a:endParaRPr>
+          </a:p>
+          <a:p>
+            <a:pPr marL="0" indent="0">
+              <a:buNone/>
+            </a:pPr>
+            <a:endParaRPr lang="en-US" altLang="en-GB" sz="900" dirty="0">
+              <a:solidFill>
+                <a:srgbClr val="9FC3C8"/>
+              </a:solidFill>
+              <a:latin typeface="Calibri" panose="020F0502020204030204" pitchFamily="34" charset="0"/>
+              <a:ea typeface="Calibri" panose="020F0502020204030204" pitchFamily="34" charset="-122"/>
+              <a:cs typeface="Calibri" panose="020F0502020204030204" pitchFamily="34" charset="-120"/>
+            </a:endParaRPr>
+          </a:p>
+          <a:p>
+            <a:pPr marL="0" indent="0">
+              <a:buNone/>
+            </a:pPr>
+            <a:endParaRPr lang="en-US" altLang="en-GB" sz="900" dirty="0">
+              <a:solidFill>
+                <a:srgbClr val="9FC3C8"/>
+              </a:solidFill>
+              <a:latin typeface="Calibri" panose="020F0502020204030204" pitchFamily="34" charset="0"/>
+              <a:ea typeface="Calibri" panose="020F0502020204030204" pitchFamily="34" charset="-122"/>
+              <a:cs typeface="Calibri" panose="020F0502020204030204" pitchFamily="34" charset="-120"/>
+            </a:endParaRPr>
+          </a:p>
+        </p:txBody>
+      </p:sp>
+      <p:sp>
+        <p:nvSpPr>
+          <p:cNvPr id="44" name="Text 38"/>
+          <p:cNvSpPr/>
+          <p:nvPr/>
+        </p:nvSpPr>
+        <p:spPr>
+          <a:xfrm>
+            <a:off x="10820095" y="6492240"/>
+            <a:ext cx="914400" cy="274320"/>
           </a:xfrm>
           <a:prstGeom prst="rect">
             <a:avLst/>
@@ -1361,410 +1358,359 @@
           <a:bodyPr wrap="square" rtlCol="0" anchor="ctr"/>
           <a:lstStyle/>
           <a:p>
-            <a:pPr marL="0" indent="0">
-              <a:buNone/>
-            </a:pPr>
-            <a:r>
-              <a:rPr lang="en-US" sz="1500" b="1" dirty="0">
+            <a:pPr marL="0" indent="0" algn="r">
+              <a:buNone/>
+            </a:pPr>
+            <a:r>
+              <a:rPr lang="en-US" sz="1000" dirty="0">
+                <a:solidFill>
+                  <a:srgbClr val="51707A"/>
+                </a:solidFill>
+                <a:latin typeface="Calibri" panose="020F0502020204030204" pitchFamily="34" charset="0"/>
+                <a:ea typeface="Calibri" panose="020F0502020204030204" pitchFamily="34" charset="-122"/>
+                <a:cs typeface="Calibri" panose="020F0502020204030204" pitchFamily="34" charset="-120"/>
+              </a:rPr>
+              <a:t>1 / 5</a:t>
+            </a:r>
+            <a:endParaRPr lang="en-US" sz="1000" dirty="0"/>
+          </a:p>
+        </p:txBody>
+      </p:sp>
+      <p:sp>
+        <p:nvSpPr>
+          <p:cNvPr id="106" name="Shape 0"/>
+          <p:cNvSpPr/>
+          <p:nvPr/>
+        </p:nvSpPr>
+        <p:spPr>
+          <a:xfrm>
+            <a:off x="8778240" y="-2011680"/>
+            <a:ext cx="6400800" cy="6400800"/>
+          </a:xfrm>
+          <a:prstGeom prst="ellipse">
+            <a:avLst/>
+          </a:prstGeom>
+          <a:solidFill>
+            <a:srgbClr val="0E7C86">
+              <a:alpha val="22000"/>
+            </a:srgbClr>
+          </a:solidFill>
+        </p:spPr>
+      </p:sp>
+      <p:sp>
+        <p:nvSpPr>
+          <p:cNvPr id="107" name="Shape 1"/>
+          <p:cNvSpPr/>
+          <p:nvPr/>
+        </p:nvSpPr>
+        <p:spPr>
+          <a:xfrm>
+            <a:off x="-2286000" y="4206240"/>
+            <a:ext cx="5486400" cy="5486400"/>
+          </a:xfrm>
+          <a:prstGeom prst="ellipse">
+            <a:avLst/>
+          </a:prstGeom>
+          <a:solidFill>
+            <a:srgbClr val="3FD6BE">
+              <a:alpha val="15000"/>
+            </a:srgbClr>
+          </a:solidFill>
+        </p:spPr>
+      </p:sp>
+      <p:sp>
+        <p:nvSpPr>
+          <p:cNvPr id="108" name="Text 2"/>
+          <p:cNvSpPr/>
+          <p:nvPr/>
+        </p:nvSpPr>
+        <p:spPr>
+          <a:xfrm>
+            <a:off x="640080" y="502920"/>
+            <a:ext cx="5486400" cy="320040"/>
+          </a:xfrm>
+          <a:prstGeom prst="rect">
+            <a:avLst/>
+          </a:prstGeom>
+          <a:noFill/>
+        </p:spPr>
+        <p:txBody>
+          <a:bodyPr wrap="square" rtlCol="0" anchor="ctr"/>
+          <a:lstStyle/>
+          <a:p>
+            <a:pPr marL="0" indent="0">
+              <a:buNone/>
+            </a:pPr>
+            <a:r>
+              <a:rPr lang="en-US" sz="1200" b="1" kern="0" spc="200" dirty="0">
                 <a:solidFill>
                   <a:srgbClr val="3FD6BE"/>
+                </a:solidFill>
+                <a:latin typeface="Calibri" panose="020F0502020204030204" pitchFamily="34" charset="0"/>
+                <a:ea typeface="Calibri" panose="020F0502020204030204" pitchFamily="34" charset="-122"/>
+                <a:cs typeface="Calibri" panose="020F0502020204030204" pitchFamily="34" charset="-120"/>
+              </a:rPr>
+              <a:t>POC  ·  SLIDE 1 OF 5</a:t>
+            </a:r>
+            <a:endParaRPr lang="en-US" sz="1200" dirty="0"/>
+          </a:p>
+        </p:txBody>
+      </p:sp>
+      <p:sp>
+        <p:nvSpPr>
+          <p:cNvPr id="109" name="Text 3"/>
+          <p:cNvSpPr/>
+          <p:nvPr/>
+        </p:nvSpPr>
+        <p:spPr>
+          <a:xfrm>
+            <a:off x="640080" y="868680"/>
+            <a:ext cx="9601200" cy="1005840"/>
+          </a:xfrm>
+          <a:prstGeom prst="rect">
+            <a:avLst/>
+          </a:prstGeom>
+          <a:noFill/>
+        </p:spPr>
+        <p:txBody>
+          <a:bodyPr wrap="square" rtlCol="0" anchor="ctr"/>
+          <a:lstStyle/>
+          <a:p>
+            <a:pPr marL="0" indent="0">
+              <a:buNone/>
+            </a:pPr>
+            <a:r>
+              <a:rPr lang="en-US" sz="4000" b="1" dirty="0">
+                <a:solidFill>
+                  <a:srgbClr val="FFFFFF"/>
                 </a:solidFill>
                 <a:latin typeface="Cambria" panose="02040503050406030204" pitchFamily="34" charset="0"/>
                 <a:ea typeface="Cambria" panose="02040503050406030204" pitchFamily="34" charset="-122"/>
                 <a:cs typeface="Cambria" panose="02040503050406030204" pitchFamily="34" charset="-120"/>
               </a:rPr>
-              <a:t>The Problem — Why Ops Teams Act Too Late</a:t>
-            </a:r>
-            <a:endParaRPr lang="en-US" sz="1500" dirty="0"/>
-          </a:p>
-        </p:txBody>
-      </p:sp>
-      <p:sp>
-        <p:nvSpPr>
-          <p:cNvPr id="8" name="Shape 6"/>
-          <p:cNvSpPr/>
-          <p:nvPr/>
-        </p:nvSpPr>
-        <p:spPr>
-          <a:xfrm>
-            <a:off x="548640" y="2423160"/>
-            <a:ext cx="402336" cy="402336"/>
+              <a:t>Intelligent Customer Signal Detector</a:t>
+            </a:r>
+            <a:endParaRPr lang="en-US" sz="4000" dirty="0"/>
+          </a:p>
+        </p:txBody>
+      </p:sp>
+      <p:sp>
+        <p:nvSpPr>
+          <p:cNvPr id="110" name="Text 4"/>
+          <p:cNvSpPr/>
+          <p:nvPr/>
+        </p:nvSpPr>
+        <p:spPr>
+          <a:xfrm>
+            <a:off x="640080" y="1691640"/>
+            <a:ext cx="9144000" cy="457200"/>
+          </a:xfrm>
+          <a:prstGeom prst="rect">
+            <a:avLst/>
+          </a:prstGeom>
+          <a:noFill/>
+        </p:spPr>
+        <p:txBody>
+          <a:bodyPr wrap="square" rtlCol="0" anchor="ctr"/>
+          <a:lstStyle/>
+          <a:p>
+            <a:pPr marL="0" indent="0">
+              <a:buNone/>
+            </a:pPr>
+            <a:r>
+              <a:rPr lang="en-US" sz="1800" dirty="0">
+                <a:solidFill>
+                  <a:srgbClr val="9FC3C8"/>
+                </a:solidFill>
+                <a:latin typeface="Calibri" panose="020F0502020204030204" pitchFamily="34" charset="0"/>
+                <a:ea typeface="Calibri" panose="020F0502020204030204" pitchFamily="34" charset="-122"/>
+                <a:cs typeface="Calibri" panose="020F0502020204030204" pitchFamily="34" charset="-120"/>
+              </a:rPr>
+              <a:t>Problem Understanding &amp; Objective</a:t>
+            </a:r>
+            <a:endParaRPr lang="en-US" sz="1800" dirty="0"/>
+          </a:p>
+        </p:txBody>
+      </p:sp>
+      <p:sp>
+        <p:nvSpPr>
+          <p:cNvPr id="111" name="Text 5"/>
+          <p:cNvSpPr/>
+          <p:nvPr/>
+        </p:nvSpPr>
+        <p:spPr>
+          <a:xfrm>
+            <a:off x="640080" y="2468880"/>
+            <a:ext cx="5120640" cy="365760"/>
+          </a:xfrm>
+          <a:prstGeom prst="rect">
+            <a:avLst/>
+          </a:prstGeom>
+          <a:noFill/>
+        </p:spPr>
+        <p:txBody>
+          <a:bodyPr wrap="square" rtlCol="0" anchor="ctr"/>
+          <a:lstStyle/>
+          <a:p>
+            <a:pPr marL="0" indent="0">
+              <a:buNone/>
+            </a:pPr>
+            <a:r>
+              <a:rPr lang="en-US" sz="1600" b="1" dirty="0">
+                <a:solidFill>
+                  <a:srgbClr val="3FD6BE"/>
+                </a:solidFill>
+                <a:latin typeface="Cambria" panose="02040503050406030204" pitchFamily="34" charset="0"/>
+                <a:ea typeface="Cambria" panose="02040503050406030204" pitchFamily="34" charset="-122"/>
+                <a:cs typeface="Cambria" panose="02040503050406030204" pitchFamily="34" charset="-120"/>
+              </a:rPr>
+              <a:t>The Problem</a:t>
+            </a:r>
+            <a:endParaRPr lang="en-US" sz="1600" dirty="0"/>
+          </a:p>
+        </p:txBody>
+      </p:sp>
+      <p:sp>
+        <p:nvSpPr>
+          <p:cNvPr id="112" name="Text 6"/>
+          <p:cNvSpPr/>
+          <p:nvPr/>
+        </p:nvSpPr>
+        <p:spPr>
+          <a:xfrm>
+            <a:off x="640080" y="2880360"/>
+            <a:ext cx="5120640" cy="914400"/>
+          </a:xfrm>
+          <a:prstGeom prst="rect">
+            <a:avLst/>
+          </a:prstGeom>
+          <a:noFill/>
+        </p:spPr>
+        <p:txBody>
+          <a:bodyPr wrap="square" rtlCol="0" anchor="ctr"/>
+          <a:lstStyle/>
+          <a:p>
+            <a:pPr marL="0" indent="0">
+              <a:lnSpc>
+                <a:spcPct val="125000"/>
+              </a:lnSpc>
+              <a:buNone/>
+            </a:pPr>
+            <a:endParaRPr lang="en-US" sz="1450" dirty="0"/>
+          </a:p>
+        </p:txBody>
+      </p:sp>
+      <p:sp>
+        <p:nvSpPr>
+          <p:cNvPr id="113" name="Text 7"/>
+          <p:cNvSpPr/>
+          <p:nvPr/>
+        </p:nvSpPr>
+        <p:spPr>
+          <a:xfrm>
+            <a:off x="640080" y="3794760"/>
+            <a:ext cx="5120640" cy="960120"/>
+          </a:xfrm>
+          <a:prstGeom prst="rect">
+            <a:avLst/>
+          </a:prstGeom>
+          <a:noFill/>
+        </p:spPr>
+        <p:txBody>
+          <a:bodyPr wrap="square" rtlCol="0" anchor="ctr"/>
+          <a:lstStyle/>
+          <a:p>
+            <a:pPr marL="0" indent="0">
+              <a:lnSpc>
+                <a:spcPct val="125000"/>
+              </a:lnSpc>
+              <a:buNone/>
+            </a:pPr>
+            <a:r>
+              <a:rPr lang="en-US" sz="1450" dirty="0">
+                <a:solidFill>
+                  <a:srgbClr val="9FC3C8"/>
+                </a:solidFill>
+                <a:latin typeface="Calibri" panose="020F0502020204030204" pitchFamily="34" charset="0"/>
+                <a:ea typeface="Calibri" panose="020F0502020204030204" pitchFamily="34" charset="-122"/>
+                <a:cs typeface="Calibri" panose="020F0502020204030204" pitchFamily="34" charset="-120"/>
+              </a:rPr>
+              <a:t>Signals exist — support chat logs, billing records, satisfaction scores — </a:t>
+            </a:r>
+            <a:r>
+              <a:rPr lang="en-US" sz="1450" dirty="0">
+                <a:solidFill>
+                  <a:srgbClr val="FFFFFF"/>
+                </a:solidFill>
+                <a:latin typeface="Calibri" panose="020F0502020204030204" pitchFamily="34" charset="0"/>
+                <a:ea typeface="Calibri" panose="020F0502020204030204" pitchFamily="34" charset="-122"/>
+                <a:cs typeface="Calibri" panose="020F0502020204030204" pitchFamily="34" charset="-120"/>
+                <a:sym typeface="+mn-ea"/>
+              </a:rPr>
+              <a:t>Customer operations teams react </a:t>
+            </a:r>
+            <a:r>
+              <a:rPr lang="en-US" sz="1450" i="1" dirty="0">
+                <a:solidFill>
+                  <a:srgbClr val="FFFFFF"/>
+                </a:solidFill>
+                <a:latin typeface="Calibri" panose="020F0502020204030204" pitchFamily="34" charset="0"/>
+                <a:ea typeface="Calibri" panose="020F0502020204030204" pitchFamily="34" charset="-122"/>
+                <a:cs typeface="Calibri" panose="020F0502020204030204" pitchFamily="34" charset="-120"/>
+                <a:sym typeface="+mn-ea"/>
+              </a:rPr>
+              <a:t>after</a:t>
+            </a:r>
+            <a:r>
+              <a:rPr lang="en-US" sz="1450" dirty="0">
+                <a:solidFill>
+                  <a:srgbClr val="FFFFFF"/>
+                </a:solidFill>
+                <a:latin typeface="Calibri" panose="020F0502020204030204" pitchFamily="34" charset="0"/>
+                <a:ea typeface="Calibri" panose="020F0502020204030204" pitchFamily="34" charset="-122"/>
+                <a:cs typeface="Calibri" panose="020F0502020204030204" pitchFamily="34" charset="-120"/>
+                <a:sym typeface="+mn-ea"/>
+              </a:rPr>
+              <a:t> the fact — by the time a complaint escalates or a cancellation request lands, the chance to intervene has already passed.</a:t>
+            </a:r>
+            <a:endParaRPr lang="en-US" sz="1450" dirty="0"/>
+          </a:p>
+          <a:p>
+            <a:pPr marL="0" indent="0">
+              <a:lnSpc>
+                <a:spcPct val="125000"/>
+              </a:lnSpc>
+              <a:buNone/>
+            </a:pPr>
+            <a:r>
+              <a:rPr lang="en-US" sz="1450" dirty="0">
+                <a:solidFill>
+                  <a:srgbClr val="9FC3C8"/>
+                </a:solidFill>
+                <a:latin typeface="Calibri" panose="020F0502020204030204" pitchFamily="34" charset="0"/>
+                <a:ea typeface="Calibri" panose="020F0502020204030204" pitchFamily="34" charset="-122"/>
+                <a:cs typeface="Calibri" panose="020F0502020204030204" pitchFamily="34" charset="-120"/>
+              </a:rPr>
+              <a:t>but they sit siloed across systems and are reviewed manually, one ticket at a time.</a:t>
+            </a:r>
+            <a:endParaRPr lang="en-US" sz="1450" dirty="0"/>
+          </a:p>
+        </p:txBody>
+      </p:sp>
+      <p:sp>
+        <p:nvSpPr>
+          <p:cNvPr id="114" name="Shape 8"/>
+          <p:cNvSpPr/>
+          <p:nvPr/>
+        </p:nvSpPr>
+        <p:spPr>
+          <a:xfrm>
+            <a:off x="6172200" y="2468880"/>
+            <a:ext cx="5394960" cy="3291840"/>
           </a:xfrm>
           <a:prstGeom prst="roundRect">
             <a:avLst>
-              <a:gd name="adj" fmla="val 28000"/>
-            </a:avLst>
-          </a:prstGeom>
-          <a:solidFill>
-            <a:srgbClr val="112B36"/>
-          </a:solidFill>
-        </p:spPr>
-      </p:sp>
-      <p:pic>
-        <p:nvPicPr>
-          <p:cNvPr id="9" name="Image 0" descr="icons/hand.png"/>
-          <p:cNvPicPr>
-            <a:picLocks noChangeAspect="1"/>
-          </p:cNvPicPr>
-          <p:nvPr/>
-        </p:nvPicPr>
-        <p:blipFill>
-          <a:blip r:embed="rId1"/>
-          <a:stretch>
-            <a:fillRect/>
-          </a:stretch>
-        </p:blipFill>
-        <p:spPr>
-          <a:xfrm>
-            <a:off x="630936" y="2505456"/>
-            <a:ext cx="237744" cy="237744"/>
-          </a:xfrm>
-          <a:prstGeom prst="rect">
-            <a:avLst/>
-          </a:prstGeom>
-        </p:spPr>
-      </p:pic>
-      <p:sp>
-        <p:nvSpPr>
-          <p:cNvPr id="10" name="Text 7"/>
-          <p:cNvSpPr/>
-          <p:nvPr/>
-        </p:nvSpPr>
-        <p:spPr>
-          <a:xfrm>
-            <a:off x="1078992" y="2404872"/>
-            <a:ext cx="4937760" cy="292608"/>
-          </a:xfrm>
-          <a:prstGeom prst="rect">
-            <a:avLst/>
-          </a:prstGeom>
-          <a:noFill/>
-        </p:spPr>
-        <p:txBody>
-          <a:bodyPr wrap="square" rtlCol="0" anchor="ctr"/>
-          <a:lstStyle/>
-          <a:p>
-            <a:pPr marL="0" indent="0">
-              <a:buNone/>
-            </a:pPr>
-            <a:r>
-              <a:rPr lang="en-US" sz="1250" b="1" dirty="0">
-                <a:solidFill>
-                  <a:srgbClr val="FFFFFF"/>
-                </a:solidFill>
-                <a:latin typeface="Calibri" panose="020F0502020204030204" pitchFamily="34" charset="0"/>
-                <a:ea typeface="Calibri" panose="020F0502020204030204" pitchFamily="34" charset="-122"/>
-                <a:cs typeface="Calibri" panose="020F0502020204030204" pitchFamily="34" charset="-120"/>
-              </a:rPr>
-              <a:t>Reactive, not proactive</a:t>
-            </a:r>
-            <a:endParaRPr lang="en-US" sz="1250" dirty="0"/>
-          </a:p>
-        </p:txBody>
-      </p:sp>
-      <p:sp>
-        <p:nvSpPr>
-          <p:cNvPr id="11" name="Text 8"/>
-          <p:cNvSpPr/>
-          <p:nvPr/>
-        </p:nvSpPr>
-        <p:spPr>
-          <a:xfrm>
-            <a:off x="1078992" y="2697480"/>
-            <a:ext cx="4937760" cy="658368"/>
-          </a:xfrm>
-          <a:prstGeom prst="rect">
-            <a:avLst/>
-          </a:prstGeom>
-          <a:noFill/>
-        </p:spPr>
-        <p:txBody>
-          <a:bodyPr wrap="square" rtlCol="0" anchor="ctr"/>
-          <a:lstStyle/>
-          <a:p>
-            <a:pPr marL="0" indent="0">
-              <a:lnSpc>
-                <a:spcPct val="120000"/>
-              </a:lnSpc>
-              <a:buNone/>
-            </a:pPr>
-            <a:r>
-              <a:rPr lang="en-US" sz="1050" dirty="0">
-                <a:solidFill>
-                  <a:srgbClr val="9FC3C8"/>
-                </a:solidFill>
-                <a:latin typeface="Calibri" panose="020F0502020204030204" pitchFamily="34" charset="0"/>
-                <a:ea typeface="Calibri" panose="020F0502020204030204" pitchFamily="34" charset="-122"/>
-                <a:cs typeface="Calibri" panose="020F0502020204030204" pitchFamily="34" charset="-120"/>
-              </a:rPr>
-              <a:t>Support teams only step in after a complaint escalates or a cancellation request is already filed — by then, the moment to retain the customer has usually passed.</a:t>
-            </a:r>
-            <a:endParaRPr lang="en-US" sz="1050" dirty="0"/>
-          </a:p>
-        </p:txBody>
-      </p:sp>
-      <p:sp>
-        <p:nvSpPr>
-          <p:cNvPr id="12" name="Shape 9"/>
-          <p:cNvSpPr/>
-          <p:nvPr/>
-        </p:nvSpPr>
-        <p:spPr>
-          <a:xfrm>
-            <a:off x="548640" y="3447288"/>
-            <a:ext cx="402336" cy="402336"/>
-          </a:xfrm>
-          <a:prstGeom prst="roundRect">
-            <a:avLst>
-              <a:gd name="adj" fmla="val 28000"/>
-            </a:avLst>
-          </a:prstGeom>
-          <a:solidFill>
-            <a:srgbClr val="112B36"/>
-          </a:solidFill>
-        </p:spPr>
-      </p:sp>
-      <p:pic>
-        <p:nvPicPr>
-          <p:cNvPr id="13" name="Image 1" descr="icons/db.png"/>
-          <p:cNvPicPr>
-            <a:picLocks noChangeAspect="1"/>
-          </p:cNvPicPr>
-          <p:nvPr/>
-        </p:nvPicPr>
-        <p:blipFill>
-          <a:blip r:embed="rId2"/>
-          <a:stretch>
-            <a:fillRect/>
-          </a:stretch>
-        </p:blipFill>
-        <p:spPr>
-          <a:xfrm>
-            <a:off x="630936" y="3529584"/>
-            <a:ext cx="237744" cy="237744"/>
-          </a:xfrm>
-          <a:prstGeom prst="rect">
-            <a:avLst/>
-          </a:prstGeom>
-        </p:spPr>
-      </p:pic>
-      <p:sp>
-        <p:nvSpPr>
-          <p:cNvPr id="14" name="Text 10"/>
-          <p:cNvSpPr/>
-          <p:nvPr/>
-        </p:nvSpPr>
-        <p:spPr>
-          <a:xfrm>
-            <a:off x="1078992" y="3429000"/>
-            <a:ext cx="4937760" cy="292608"/>
-          </a:xfrm>
-          <a:prstGeom prst="rect">
-            <a:avLst/>
-          </a:prstGeom>
-          <a:noFill/>
-        </p:spPr>
-        <p:txBody>
-          <a:bodyPr wrap="square" rtlCol="0" anchor="ctr"/>
-          <a:lstStyle/>
-          <a:p>
-            <a:pPr marL="0" indent="0">
-              <a:buNone/>
-            </a:pPr>
-            <a:r>
-              <a:rPr lang="en-US" sz="1250" b="1" dirty="0">
-                <a:solidFill>
-                  <a:srgbClr val="FFFFFF"/>
-                </a:solidFill>
-                <a:latin typeface="Calibri" panose="020F0502020204030204" pitchFamily="34" charset="0"/>
-                <a:ea typeface="Calibri" panose="020F0502020204030204" pitchFamily="34" charset="-122"/>
-                <a:cs typeface="Calibri" panose="020F0502020204030204" pitchFamily="34" charset="-120"/>
-              </a:rPr>
-              <a:t>Signals exist, but sit siloed</a:t>
-            </a:r>
-            <a:endParaRPr lang="en-US" sz="1250" dirty="0"/>
-          </a:p>
-        </p:txBody>
-      </p:sp>
-      <p:sp>
-        <p:nvSpPr>
-          <p:cNvPr id="15" name="Text 11"/>
-          <p:cNvSpPr/>
-          <p:nvPr/>
-        </p:nvSpPr>
-        <p:spPr>
-          <a:xfrm>
-            <a:off x="1078992" y="3721608"/>
-            <a:ext cx="4937760" cy="658368"/>
-          </a:xfrm>
-          <a:prstGeom prst="rect">
-            <a:avLst/>
-          </a:prstGeom>
-          <a:noFill/>
-        </p:spPr>
-        <p:txBody>
-          <a:bodyPr wrap="square" rtlCol="0" anchor="ctr"/>
-          <a:lstStyle/>
-          <a:p>
-            <a:pPr marL="0" indent="0">
-              <a:lnSpc>
-                <a:spcPct val="120000"/>
-              </a:lnSpc>
-              <a:buNone/>
-            </a:pPr>
-            <a:r>
-              <a:rPr lang="en-US" sz="1050" dirty="0">
-                <a:solidFill>
-                  <a:srgbClr val="9FC3C8"/>
-                </a:solidFill>
-                <a:latin typeface="Calibri" panose="020F0502020204030204" pitchFamily="34" charset="0"/>
-                <a:ea typeface="Calibri" panose="020F0502020204030204" pitchFamily="34" charset="-122"/>
-                <a:cs typeface="Calibri" panose="020F0502020204030204" pitchFamily="34" charset="-120"/>
-              </a:rPr>
-              <a:t>Support chat logs, billing history, and satisfaction scores each live in a different system, so no single view of “who is at risk and why” ever forms.</a:t>
-            </a:r>
-            <a:endParaRPr lang="en-US" sz="1050" dirty="0"/>
-          </a:p>
-        </p:txBody>
-      </p:sp>
-      <p:sp>
-        <p:nvSpPr>
-          <p:cNvPr id="16" name="Shape 12"/>
-          <p:cNvSpPr/>
-          <p:nvPr/>
-        </p:nvSpPr>
-        <p:spPr>
-          <a:xfrm>
-            <a:off x="548640" y="4471416"/>
-            <a:ext cx="402336" cy="402336"/>
-          </a:xfrm>
-          <a:prstGeom prst="roundRect">
-            <a:avLst>
-              <a:gd name="adj" fmla="val 28000"/>
-            </a:avLst>
-          </a:prstGeom>
-          <a:solidFill>
-            <a:srgbClr val="112B36"/>
-          </a:solidFill>
-        </p:spPr>
-      </p:sp>
-      <p:pic>
-        <p:nvPicPr>
-          <p:cNvPr id="17" name="Image 2" descr="icons/users.png"/>
-          <p:cNvPicPr>
-            <a:picLocks noChangeAspect="1"/>
-          </p:cNvPicPr>
-          <p:nvPr/>
-        </p:nvPicPr>
-        <p:blipFill>
-          <a:blip r:embed="rId3"/>
-          <a:stretch>
-            <a:fillRect/>
-          </a:stretch>
-        </p:blipFill>
-        <p:spPr>
-          <a:xfrm>
-            <a:off x="630936" y="4553712"/>
-            <a:ext cx="237744" cy="237744"/>
-          </a:xfrm>
-          <a:prstGeom prst="rect">
-            <a:avLst/>
-          </a:prstGeom>
-        </p:spPr>
-      </p:pic>
-      <p:sp>
-        <p:nvSpPr>
-          <p:cNvPr id="18" name="Text 13"/>
-          <p:cNvSpPr/>
-          <p:nvPr/>
-        </p:nvSpPr>
-        <p:spPr>
-          <a:xfrm>
-            <a:off x="1078992" y="4453128"/>
-            <a:ext cx="4937760" cy="292608"/>
-          </a:xfrm>
-          <a:prstGeom prst="rect">
-            <a:avLst/>
-          </a:prstGeom>
-          <a:noFill/>
-        </p:spPr>
-        <p:txBody>
-          <a:bodyPr wrap="square" rtlCol="0" anchor="ctr"/>
-          <a:lstStyle/>
-          <a:p>
-            <a:pPr marL="0" indent="0">
-              <a:buNone/>
-            </a:pPr>
-            <a:r>
-              <a:rPr lang="en-US" sz="1250" b="1" dirty="0">
-                <a:solidFill>
-                  <a:srgbClr val="FFFFFF"/>
-                </a:solidFill>
-                <a:latin typeface="Calibri" panose="020F0502020204030204" pitchFamily="34" charset="0"/>
-                <a:ea typeface="Calibri" panose="020F0502020204030204" pitchFamily="34" charset="-122"/>
-                <a:cs typeface="Calibri" panose="020F0502020204030204" pitchFamily="34" charset="-120"/>
-              </a:rPr>
-              <a:t>Manual review doesn't scale</a:t>
-            </a:r>
-            <a:endParaRPr lang="en-US" sz="1250" dirty="0"/>
-          </a:p>
-        </p:txBody>
-      </p:sp>
-      <p:sp>
-        <p:nvSpPr>
-          <p:cNvPr id="19" name="Text 14"/>
-          <p:cNvSpPr/>
-          <p:nvPr/>
-        </p:nvSpPr>
-        <p:spPr>
-          <a:xfrm>
-            <a:off x="1078992" y="4745736"/>
-            <a:ext cx="4937760" cy="658368"/>
-          </a:xfrm>
-          <a:prstGeom prst="rect">
-            <a:avLst/>
-          </a:prstGeom>
-          <a:noFill/>
-        </p:spPr>
-        <p:txBody>
-          <a:bodyPr wrap="square" rtlCol="0" anchor="ctr"/>
-          <a:lstStyle/>
-          <a:p>
-            <a:pPr marL="0" indent="0">
-              <a:lnSpc>
-                <a:spcPct val="120000"/>
-              </a:lnSpc>
-              <a:buNone/>
-            </a:pPr>
-            <a:r>
-              <a:rPr lang="en-US" sz="1050" dirty="0">
-                <a:solidFill>
-                  <a:srgbClr val="9FC3C8"/>
-                </a:solidFill>
-                <a:latin typeface="Calibri" panose="020F0502020204030204" pitchFamily="34" charset="0"/>
-                <a:ea typeface="Calibri" panose="020F0502020204030204" pitchFamily="34" charset="-122"/>
-                <a:cs typeface="Calibri" panose="020F0502020204030204" pitchFamily="34" charset="-120"/>
-              </a:rPr>
-              <a:t>Analysts triage tickets one at a time. There is no automated, prioritised, evidence-backed list of at-risk customers to work from.</a:t>
-            </a:r>
-            <a:endParaRPr lang="en-US" sz="1050" dirty="0"/>
-          </a:p>
-        </p:txBody>
-      </p:sp>
-      <p:sp>
-        <p:nvSpPr>
-          <p:cNvPr id="20" name="Shape 15"/>
-          <p:cNvSpPr/>
-          <p:nvPr/>
-        </p:nvSpPr>
-        <p:spPr>
-          <a:xfrm>
-            <a:off x="6355080" y="1965960"/>
-            <a:ext cx="5257800" cy="3794760"/>
-          </a:xfrm>
-          <a:prstGeom prst="roundRect">
-            <a:avLst>
-              <a:gd name="adj" fmla="val 2892"/>
+              <a:gd name="adj" fmla="val 3333"/>
             </a:avLst>
           </a:prstGeom>
           <a:solidFill>
@@ -1780,14 +1726,14 @@
       </p:sp>
       <p:sp>
         <p:nvSpPr>
-          <p:cNvPr id="21" name="Shape 16"/>
-          <p:cNvSpPr/>
-          <p:nvPr/>
-        </p:nvSpPr>
-        <p:spPr>
-          <a:xfrm>
-            <a:off x="6675120" y="2240280"/>
-            <a:ext cx="502920" cy="502920"/>
+          <p:cNvPr id="115" name="Shape 9"/>
+          <p:cNvSpPr/>
+          <p:nvPr/>
+        </p:nvSpPr>
+        <p:spPr>
+          <a:xfrm>
+            <a:off x="6492240" y="2743200"/>
+            <a:ext cx="548640" cy="548640"/>
           </a:xfrm>
           <a:prstGeom prst="roundRect">
             <a:avLst>
@@ -1801,22 +1747,22 @@
       </p:sp>
       <p:pic>
         <p:nvPicPr>
-          <p:cNvPr id="22" name="Image 3" descr="icons/bullseye.png"/>
+          <p:cNvPr id="116" name="Image 0" descr="icons/bullseye.png"/>
           <p:cNvPicPr>
             <a:picLocks noChangeAspect="1"/>
           </p:cNvPicPr>
           <p:nvPr/>
         </p:nvPicPr>
         <p:blipFill>
-          <a:blip r:embed="rId4"/>
+          <a:blip r:embed="rId1"/>
           <a:stretch>
             <a:fillRect/>
           </a:stretch>
         </p:blipFill>
         <p:spPr>
           <a:xfrm>
-            <a:off x="6876288" y="2441448"/>
-            <a:ext cx="100584" cy="100584"/>
+            <a:off x="6693408" y="2944368"/>
+            <a:ext cx="146304" cy="146304"/>
           </a:xfrm>
           <a:prstGeom prst="rect">
             <a:avLst/>
@@ -1825,14 +1771,14 @@
       </p:pic>
       <p:sp>
         <p:nvSpPr>
-          <p:cNvPr id="23" name="Text 17"/>
-          <p:cNvSpPr/>
-          <p:nvPr/>
-        </p:nvSpPr>
-        <p:spPr>
-          <a:xfrm>
-            <a:off x="7360920" y="2258568"/>
-            <a:ext cx="4023360" cy="457200"/>
+          <p:cNvPr id="117" name="Text 10"/>
+          <p:cNvSpPr/>
+          <p:nvPr/>
+        </p:nvSpPr>
+        <p:spPr>
+          <a:xfrm>
+            <a:off x="7223760" y="2770632"/>
+            <a:ext cx="4114800" cy="457200"/>
           </a:xfrm>
           <a:prstGeom prst="rect">
             <a:avLst/>
@@ -1847,7 +1793,7 @@
               <a:buNone/>
             </a:pPr>
             <a:r>
-              <a:rPr lang="en-US" sz="1700" b="1" dirty="0">
+              <a:rPr lang="en-US" sz="1800" b="1" dirty="0">
                 <a:solidFill>
                   <a:srgbClr val="FFFFFF"/>
                 </a:solidFill>
@@ -1855,22 +1801,22 @@
                 <a:ea typeface="Cambria" panose="02040503050406030204" pitchFamily="34" charset="-122"/>
                 <a:cs typeface="Cambria" panose="02040503050406030204" pitchFamily="34" charset="-120"/>
               </a:rPr>
-              <a:t>Our Objective</a:t>
-            </a:r>
-            <a:endParaRPr lang="en-US" sz="1700" dirty="0"/>
-          </a:p>
-        </p:txBody>
-      </p:sp>
-      <p:sp>
-        <p:nvSpPr>
-          <p:cNvPr id="24" name="Text 18"/>
-          <p:cNvSpPr/>
-          <p:nvPr/>
-        </p:nvSpPr>
-        <p:spPr>
-          <a:xfrm>
-            <a:off x="6675120" y="2834640"/>
-            <a:ext cx="4617720" cy="868680"/>
+              <a:t>Objective</a:t>
+            </a:r>
+            <a:endParaRPr lang="en-US" sz="1800" dirty="0"/>
+          </a:p>
+        </p:txBody>
+      </p:sp>
+      <p:sp>
+        <p:nvSpPr>
+          <p:cNvPr id="118" name="Text 11"/>
+          <p:cNvSpPr/>
+          <p:nvPr/>
+        </p:nvSpPr>
+        <p:spPr>
+          <a:xfrm>
+            <a:off x="6492240" y="3429000"/>
+            <a:ext cx="4754880" cy="1051560"/>
           </a:xfrm>
           <a:prstGeom prst="rect">
             <a:avLst/>
@@ -1888,73 +1834,34 @@
               <a:buNone/>
             </a:pPr>
             <a:r>
-              <a:rPr lang="en-US" sz="1200" dirty="0">
+              <a:rPr lang="en-US" sz="1300" dirty="0">
                 <a:solidFill>
                   <a:srgbClr val="FFFFFF"/>
                 </a:solidFill>
                 <a:latin typeface="Calibri" panose="020F0502020204030204" pitchFamily="34" charset="0"/>
                 <a:ea typeface="Calibri" panose="020F0502020204030204" pitchFamily="34" charset="-122"/>
                 <a:cs typeface="Calibri" panose="020F0502020204030204" pitchFamily="34" charset="-120"/>
-                <a:sym typeface="+mn-ea"/>
               </a:rPr>
               <a:t>Design and demonstrate an AI prototype that analyses customer interaction data — feedback, support transcripts, and usage patterns — to surface early-warning signals and behavioural trends before they escalate.</a:t>
             </a:r>
-            <a:endParaRPr lang="en-US" sz="1200" dirty="0"/>
-          </a:p>
-        </p:txBody>
-      </p:sp>
-      <p:sp>
-        <p:nvSpPr>
-          <p:cNvPr id="25" name="Text 19"/>
-          <p:cNvSpPr/>
-          <p:nvPr/>
-        </p:nvSpPr>
-        <p:spPr>
-          <a:xfrm>
-            <a:off x="6675120" y="3703320"/>
-            <a:ext cx="4572000" cy="274320"/>
-          </a:xfrm>
-          <a:prstGeom prst="rect">
-            <a:avLst/>
-          </a:prstGeom>
-          <a:noFill/>
-        </p:spPr>
-        <p:txBody>
-          <a:bodyPr wrap="square" rtlCol="0" anchor="ctr"/>
-          <a:lstStyle/>
-          <a:p>
-            <a:pPr marL="0" indent="0">
-              <a:buNone/>
-            </a:pPr>
-            <a:r>
-              <a:rPr lang="en-US" sz="1150" b="1" dirty="0">
-                <a:solidFill>
-                  <a:srgbClr val="3FD6BE"/>
-                </a:solidFill>
-                <a:latin typeface="Calibri" panose="020F0502020204030204" pitchFamily="34" charset="0"/>
-                <a:ea typeface="Calibri" panose="020F0502020204030204" pitchFamily="34" charset="-122"/>
-                <a:cs typeface="Calibri" panose="020F0502020204030204" pitchFamily="34" charset="-120"/>
-              </a:rPr>
-              <a:t>The prototype must output, per customer:</a:t>
-            </a:r>
-            <a:endParaRPr lang="en-US" sz="1150" dirty="0"/>
-          </a:p>
-        </p:txBody>
-      </p:sp>
-      <p:sp>
-        <p:nvSpPr>
-          <p:cNvPr id="26" name="Shape 20"/>
-          <p:cNvSpPr/>
-          <p:nvPr/>
-        </p:nvSpPr>
-        <p:spPr>
-          <a:xfrm>
-            <a:off x="6675120" y="4023360"/>
-            <a:ext cx="329184" cy="329184"/>
+            <a:endParaRPr lang="en-US" sz="1300" dirty="0"/>
+          </a:p>
+        </p:txBody>
+      </p:sp>
+      <p:sp>
+        <p:nvSpPr>
+          <p:cNvPr id="119" name="Shape 12"/>
+          <p:cNvSpPr/>
+          <p:nvPr/>
+        </p:nvSpPr>
+        <p:spPr>
+          <a:xfrm>
+            <a:off x="6492240" y="4572000"/>
+            <a:ext cx="274320" cy="274320"/>
           </a:xfrm>
           <a:prstGeom prst="roundRect">
             <a:avLst>
-              <a:gd name="adj" fmla="val 22222"/>
+              <a:gd name="adj" fmla="val 28000"/>
             </a:avLst>
           </a:prstGeom>
           <a:solidFill>
@@ -1962,685 +1869,500 @@
           </a:solidFill>
         </p:spPr>
       </p:sp>
-      <p:sp>
-        <p:nvSpPr>
-          <p:cNvPr id="27" name="Text 21"/>
-          <p:cNvSpPr/>
-          <p:nvPr/>
-        </p:nvSpPr>
-        <p:spPr>
-          <a:xfrm>
-            <a:off x="6675120" y="4023360"/>
-            <a:ext cx="329184" cy="329184"/>
-          </a:xfrm>
-          <a:prstGeom prst="rect">
-            <a:avLst/>
-          </a:prstGeom>
-          <a:noFill/>
-        </p:spPr>
-        <p:txBody>
-          <a:bodyPr wrap="square" rtlCol="0" anchor="ctr"/>
-          <a:lstStyle/>
-          <a:p>
-            <a:pPr marL="0" indent="0" algn="ctr">
-              <a:buNone/>
-            </a:pPr>
-            <a:r>
-              <a:rPr lang="en-US" sz="1300" b="1" dirty="0">
-                <a:solidFill>
-                  <a:srgbClr val="FFFFFF"/>
-                </a:solidFill>
-                <a:latin typeface="Calibri" panose="020F0502020204030204" pitchFamily="34" charset="0"/>
-                <a:ea typeface="Calibri" panose="020F0502020204030204" pitchFamily="34" charset="-122"/>
-                <a:cs typeface="Calibri" panose="020F0502020204030204" pitchFamily="34" charset="-120"/>
-              </a:rPr>
-              <a:t>1</a:t>
-            </a:r>
-            <a:endParaRPr lang="en-US" sz="1300" dirty="0"/>
-          </a:p>
-        </p:txBody>
-      </p:sp>
-      <p:sp>
-        <p:nvSpPr>
-          <p:cNvPr id="28" name="Text 22"/>
-          <p:cNvSpPr/>
-          <p:nvPr/>
-        </p:nvSpPr>
-        <p:spPr>
-          <a:xfrm>
-            <a:off x="7114032" y="4041648"/>
-            <a:ext cx="4206240" cy="365760"/>
-          </a:xfrm>
-          <a:prstGeom prst="rect">
-            <a:avLst/>
-          </a:prstGeom>
-          <a:noFill/>
-        </p:spPr>
-        <p:txBody>
-          <a:bodyPr wrap="square" rtlCol="0" anchor="ctr"/>
-          <a:lstStyle/>
-          <a:p>
-            <a:pPr marL="0" indent="0">
-              <a:buNone/>
-            </a:pPr>
-            <a:r>
-              <a:rPr lang="en-US" sz="1150" dirty="0">
-                <a:solidFill>
-                  <a:srgbClr val="FFFFFF"/>
-                </a:solidFill>
-                <a:latin typeface="Calibri" panose="020F0502020204030204" pitchFamily="34" charset="0"/>
-                <a:ea typeface="Calibri" panose="020F0502020204030204" pitchFamily="34" charset="-122"/>
-                <a:cs typeface="Calibri" panose="020F0502020204030204" pitchFamily="34" charset="-120"/>
-              </a:rPr>
-              <a:t>A risk / urgency score (0–100), clearly banded</a:t>
-            </a:r>
-            <a:endParaRPr lang="en-US" sz="1150" dirty="0"/>
-          </a:p>
-        </p:txBody>
-      </p:sp>
-      <p:sp>
-        <p:nvSpPr>
-          <p:cNvPr id="29" name="Shape 23"/>
-          <p:cNvSpPr/>
-          <p:nvPr/>
-        </p:nvSpPr>
-        <p:spPr>
-          <a:xfrm>
-            <a:off x="6675120" y="4480560"/>
-            <a:ext cx="329184" cy="329184"/>
-          </a:xfrm>
-          <a:prstGeom prst="roundRect">
-            <a:avLst>
-              <a:gd name="adj" fmla="val 22222"/>
-            </a:avLst>
-          </a:prstGeom>
-          <a:solidFill>
-            <a:srgbClr val="0E7C86"/>
-          </a:solidFill>
-        </p:spPr>
-      </p:sp>
-      <p:sp>
-        <p:nvSpPr>
-          <p:cNvPr id="30" name="Text 24"/>
-          <p:cNvSpPr/>
-          <p:nvPr/>
-        </p:nvSpPr>
-        <p:spPr>
-          <a:xfrm>
-            <a:off x="6675120" y="4480560"/>
-            <a:ext cx="329184" cy="329184"/>
-          </a:xfrm>
-          <a:prstGeom prst="rect">
-            <a:avLst/>
-          </a:prstGeom>
-          <a:noFill/>
-        </p:spPr>
-        <p:txBody>
-          <a:bodyPr wrap="square" rtlCol="0" anchor="ctr"/>
-          <a:lstStyle/>
-          <a:p>
-            <a:pPr marL="0" indent="0" algn="ctr">
-              <a:buNone/>
-            </a:pPr>
-            <a:r>
-              <a:rPr lang="en-US" sz="1300" b="1" dirty="0">
-                <a:solidFill>
-                  <a:srgbClr val="FFFFFF"/>
-                </a:solidFill>
-                <a:latin typeface="Calibri" panose="020F0502020204030204" pitchFamily="34" charset="0"/>
-                <a:ea typeface="Calibri" panose="020F0502020204030204" pitchFamily="34" charset="-122"/>
-                <a:cs typeface="Calibri" panose="020F0502020204030204" pitchFamily="34" charset="-120"/>
-              </a:rPr>
-              <a:t>2</a:t>
-            </a:r>
-            <a:endParaRPr lang="en-US" sz="1300" dirty="0"/>
-          </a:p>
-        </p:txBody>
-      </p:sp>
-      <p:sp>
-        <p:nvSpPr>
-          <p:cNvPr id="31" name="Text 25"/>
-          <p:cNvSpPr/>
-          <p:nvPr/>
-        </p:nvSpPr>
-        <p:spPr>
-          <a:xfrm>
-            <a:off x="7114032" y="4498848"/>
-            <a:ext cx="4206240" cy="365760"/>
-          </a:xfrm>
-          <a:prstGeom prst="rect">
-            <a:avLst/>
-          </a:prstGeom>
-          <a:noFill/>
-        </p:spPr>
-        <p:txBody>
-          <a:bodyPr wrap="square" rtlCol="0" anchor="ctr"/>
-          <a:lstStyle/>
-          <a:p>
-            <a:pPr marL="0" indent="0">
-              <a:buNone/>
-            </a:pPr>
-            <a:r>
-              <a:rPr lang="en-US" sz="1150" dirty="0">
-                <a:solidFill>
-                  <a:srgbClr val="FFFFFF"/>
-                </a:solidFill>
-                <a:latin typeface="Calibri" panose="020F0502020204030204" pitchFamily="34" charset="0"/>
-                <a:ea typeface="Calibri" panose="020F0502020204030204" pitchFamily="34" charset="-122"/>
-                <a:cs typeface="Calibri" panose="020F0502020204030204" pitchFamily="34" charset="-120"/>
-              </a:rPr>
-              <a:t>A prioritised, ranked list of at-risk customers</a:t>
-            </a:r>
-            <a:endParaRPr lang="en-US" sz="1150" dirty="0"/>
-          </a:p>
-        </p:txBody>
-      </p:sp>
-      <p:sp>
-        <p:nvSpPr>
-          <p:cNvPr id="32" name="Shape 26"/>
-          <p:cNvSpPr/>
-          <p:nvPr/>
-        </p:nvSpPr>
-        <p:spPr>
-          <a:xfrm>
-            <a:off x="6675120" y="4937760"/>
-            <a:ext cx="329184" cy="329184"/>
-          </a:xfrm>
-          <a:prstGeom prst="roundRect">
-            <a:avLst>
-              <a:gd name="adj" fmla="val 22222"/>
-            </a:avLst>
-          </a:prstGeom>
-          <a:solidFill>
-            <a:srgbClr val="0E7C86"/>
-          </a:solidFill>
-        </p:spPr>
-      </p:sp>
-      <p:sp>
-        <p:nvSpPr>
-          <p:cNvPr id="33" name="Text 27"/>
-          <p:cNvSpPr/>
-          <p:nvPr/>
-        </p:nvSpPr>
-        <p:spPr>
-          <a:xfrm>
-            <a:off x="6675120" y="4937760"/>
-            <a:ext cx="329184" cy="329184"/>
-          </a:xfrm>
-          <a:prstGeom prst="rect">
-            <a:avLst/>
-          </a:prstGeom>
-          <a:noFill/>
-        </p:spPr>
-        <p:txBody>
-          <a:bodyPr wrap="square" rtlCol="0" anchor="ctr"/>
-          <a:lstStyle/>
-          <a:p>
-            <a:pPr marL="0" indent="0" algn="ctr">
-              <a:buNone/>
-            </a:pPr>
-            <a:r>
-              <a:rPr lang="en-US" sz="1300" b="1" dirty="0">
-                <a:solidFill>
-                  <a:srgbClr val="FFFFFF"/>
-                </a:solidFill>
-                <a:latin typeface="Calibri" panose="020F0502020204030204" pitchFamily="34" charset="0"/>
-                <a:ea typeface="Calibri" panose="020F0502020204030204" pitchFamily="34" charset="-122"/>
-                <a:cs typeface="Calibri" panose="020F0502020204030204" pitchFamily="34" charset="-120"/>
-              </a:rPr>
-              <a:t>3</a:t>
-            </a:r>
-            <a:endParaRPr lang="en-US" sz="1300" dirty="0"/>
-          </a:p>
-        </p:txBody>
-      </p:sp>
-      <p:sp>
-        <p:nvSpPr>
-          <p:cNvPr id="34" name="Text 28"/>
-          <p:cNvSpPr/>
-          <p:nvPr/>
-        </p:nvSpPr>
-        <p:spPr>
-          <a:xfrm>
-            <a:off x="7114032" y="4956048"/>
-            <a:ext cx="4206240" cy="365760"/>
-          </a:xfrm>
-          <a:prstGeom prst="rect">
-            <a:avLst/>
-          </a:prstGeom>
-          <a:noFill/>
-        </p:spPr>
-        <p:txBody>
-          <a:bodyPr wrap="square" rtlCol="0" anchor="ctr"/>
-          <a:lstStyle/>
-          <a:p>
-            <a:pPr marL="0" indent="0">
-              <a:buNone/>
-            </a:pPr>
-            <a:r>
-              <a:rPr lang="en-US" sz="1150" dirty="0">
-                <a:solidFill>
-                  <a:srgbClr val="FFFFFF"/>
-                </a:solidFill>
-                <a:latin typeface="Calibri" panose="020F0502020204030204" pitchFamily="34" charset="0"/>
-                <a:ea typeface="Calibri" panose="020F0502020204030204" pitchFamily="34" charset="-122"/>
-                <a:cs typeface="Calibri" panose="020F0502020204030204" pitchFamily="34" charset="-120"/>
-                <a:sym typeface="+mn-ea"/>
-              </a:rPr>
-              <a:t>Brief AI rationale, clear for a retention team</a:t>
-            </a:r>
-            <a:endParaRPr lang="en-US" sz="1150" dirty="0"/>
-          </a:p>
-        </p:txBody>
-      </p:sp>
-      <p:sp>
-        <p:nvSpPr>
-          <p:cNvPr id="35" name="Text 29"/>
-          <p:cNvSpPr/>
-          <p:nvPr/>
-        </p:nvSpPr>
-        <p:spPr>
-          <a:xfrm>
-            <a:off x="548640" y="5852160"/>
-            <a:ext cx="2583180" cy="438912"/>
-          </a:xfrm>
-          <a:prstGeom prst="rect">
-            <a:avLst/>
-          </a:prstGeom>
-          <a:noFill/>
-        </p:spPr>
-        <p:txBody>
-          <a:bodyPr wrap="square" rtlCol="0" anchor="ctr"/>
-          <a:lstStyle/>
-          <a:p>
-            <a:pPr marL="0" indent="0">
-              <a:buNone/>
-            </a:pPr>
-            <a:r>
-              <a:rPr lang="en-US" sz="2200" b="1" dirty="0">
-                <a:solidFill>
-                  <a:srgbClr val="3FD6BE"/>
-                </a:solidFill>
-                <a:latin typeface="Cambria" panose="02040503050406030204" pitchFamily="34" charset="0"/>
-                <a:ea typeface="Cambria" panose="02040503050406030204" pitchFamily="34" charset="-122"/>
-                <a:cs typeface="Cambria" panose="02040503050406030204" pitchFamily="34" charset="-120"/>
-              </a:rPr>
-              <a:t>3 days</a:t>
-            </a:r>
-            <a:endParaRPr lang="en-US" sz="2200" dirty="0"/>
-          </a:p>
-        </p:txBody>
-      </p:sp>
-      <p:sp>
-        <p:nvSpPr>
-          <p:cNvPr id="36" name="Text 30"/>
-          <p:cNvSpPr/>
-          <p:nvPr/>
-        </p:nvSpPr>
-        <p:spPr>
-          <a:xfrm>
-            <a:off x="548640" y="6263640"/>
-            <a:ext cx="2583180" cy="310896"/>
-          </a:xfrm>
-          <a:prstGeom prst="rect">
-            <a:avLst/>
-          </a:prstGeom>
-          <a:noFill/>
-        </p:spPr>
-        <p:txBody>
-          <a:bodyPr wrap="square" rtlCol="0" anchor="ctr"/>
-          <a:lstStyle/>
-          <a:p>
-            <a:pPr marL="0" indent="0">
-              <a:buNone/>
-            </a:pPr>
-            <a:r>
-              <a:rPr lang="en-US" sz="900" dirty="0">
-                <a:solidFill>
-                  <a:srgbClr val="9FC3C8"/>
-                </a:solidFill>
-                <a:latin typeface="Calibri" panose="020F0502020204030204" pitchFamily="34" charset="0"/>
-                <a:ea typeface="Calibri" panose="020F0502020204030204" pitchFamily="34" charset="-122"/>
-                <a:cs typeface="Calibri" panose="020F0502020204030204" pitchFamily="34" charset="-120"/>
-              </a:rPr>
-              <a:t>Build &amp; submission window</a:t>
-            </a:r>
-            <a:endParaRPr lang="en-US" sz="900" dirty="0"/>
-          </a:p>
-        </p:txBody>
-      </p:sp>
-      <p:sp>
-        <p:nvSpPr>
-          <p:cNvPr id="37" name="Text 31"/>
-          <p:cNvSpPr/>
-          <p:nvPr/>
-        </p:nvSpPr>
-        <p:spPr>
-          <a:xfrm>
-            <a:off x="3314700" y="5852160"/>
-            <a:ext cx="2583180" cy="438912"/>
-          </a:xfrm>
-          <a:prstGeom prst="rect">
-            <a:avLst/>
-          </a:prstGeom>
-          <a:noFill/>
-        </p:spPr>
-        <p:txBody>
-          <a:bodyPr wrap="square" rtlCol="0" anchor="ctr"/>
-          <a:lstStyle/>
-          <a:p>
-            <a:pPr marL="0" indent="0">
-              <a:buNone/>
-            </a:pPr>
-            <a:r>
-              <a:rPr lang="en-US" sz="2200" b="1" dirty="0">
-                <a:solidFill>
-                  <a:srgbClr val="3FD6BE"/>
-                </a:solidFill>
-                <a:latin typeface="Cambria" panose="02040503050406030204" pitchFamily="34" charset="0"/>
-                <a:ea typeface="Cambria" panose="02040503050406030204" pitchFamily="34" charset="-122"/>
-                <a:cs typeface="Cambria" panose="02040503050406030204" pitchFamily="34" charset="-120"/>
-              </a:rPr>
-              <a:t>57</a:t>
-            </a:r>
-            <a:endParaRPr lang="en-US" sz="2200" dirty="0"/>
-          </a:p>
-        </p:txBody>
-      </p:sp>
-      <p:sp>
-        <p:nvSpPr>
-          <p:cNvPr id="38" name="Text 32"/>
-          <p:cNvSpPr/>
-          <p:nvPr/>
-        </p:nvSpPr>
-        <p:spPr>
-          <a:xfrm>
-            <a:off x="3314700" y="6263640"/>
-            <a:ext cx="2583180" cy="310896"/>
-          </a:xfrm>
-          <a:prstGeom prst="rect">
-            <a:avLst/>
-          </a:prstGeom>
-          <a:noFill/>
-        </p:spPr>
-        <p:txBody>
-          <a:bodyPr wrap="square" rtlCol="0" anchor="ctr"/>
-          <a:lstStyle/>
-          <a:p>
-            <a:pPr marL="0" indent="0">
-              <a:buNone/>
-            </a:pPr>
-            <a:r>
-              <a:rPr lang="en-US" sz="900" dirty="0">
-                <a:solidFill>
-                  <a:srgbClr val="9FC3C8"/>
-                </a:solidFill>
-                <a:latin typeface="Calibri" panose="020F0502020204030204" pitchFamily="34" charset="0"/>
-                <a:ea typeface="Calibri" panose="020F0502020204030204" pitchFamily="34" charset="-122"/>
-                <a:cs typeface="Calibri" panose="020F0502020204030204" pitchFamily="34" charset="-120"/>
-              </a:rPr>
-              <a:t>Structured signal fields per customer</a:t>
-            </a:r>
-            <a:endParaRPr lang="en-US" sz="900" dirty="0"/>
-          </a:p>
-        </p:txBody>
-      </p:sp>
-      <p:sp>
-        <p:nvSpPr>
-          <p:cNvPr id="39" name="Text 33"/>
-          <p:cNvSpPr/>
-          <p:nvPr/>
-        </p:nvSpPr>
-        <p:spPr>
-          <a:xfrm>
-            <a:off x="6080760" y="5852160"/>
-            <a:ext cx="2583180" cy="438912"/>
-          </a:xfrm>
-          <a:prstGeom prst="rect">
-            <a:avLst/>
-          </a:prstGeom>
-          <a:noFill/>
-        </p:spPr>
-        <p:txBody>
-          <a:bodyPr wrap="square" rtlCol="0" anchor="ctr"/>
-          <a:lstStyle/>
-          <a:p>
-            <a:pPr marL="0" indent="0">
-              <a:buNone/>
-            </a:pPr>
-            <a:r>
-              <a:rPr lang="en-US" sz="2200" b="1" dirty="0">
-                <a:solidFill>
-                  <a:srgbClr val="3FD6BE"/>
-                </a:solidFill>
-                <a:latin typeface="Cambria" panose="02040503050406030204" pitchFamily="34" charset="0"/>
-                <a:ea typeface="Cambria" panose="02040503050406030204" pitchFamily="34" charset="-122"/>
-                <a:cs typeface="Cambria" panose="02040503050406030204" pitchFamily="34" charset="-120"/>
-              </a:rPr>
-              <a:t>200</a:t>
-            </a:r>
-            <a:endParaRPr lang="en-US" sz="2200" dirty="0"/>
-          </a:p>
-        </p:txBody>
-      </p:sp>
-      <p:sp>
-        <p:nvSpPr>
-          <p:cNvPr id="40" name="Text 34"/>
-          <p:cNvSpPr/>
-          <p:nvPr/>
-        </p:nvSpPr>
-        <p:spPr>
-          <a:xfrm>
-            <a:off x="6080760" y="6263640"/>
-            <a:ext cx="2583180" cy="310896"/>
-          </a:xfrm>
-          <a:prstGeom prst="rect">
-            <a:avLst/>
-          </a:prstGeom>
-          <a:noFill/>
-        </p:spPr>
-        <p:txBody>
-          <a:bodyPr wrap="square" rtlCol="0" anchor="ctr"/>
-          <a:lstStyle/>
-          <a:p>
-            <a:pPr marL="0" indent="0">
-              <a:buNone/>
-            </a:pPr>
-            <a:r>
-              <a:rPr lang="en-US" sz="900" dirty="0">
-                <a:solidFill>
-                  <a:srgbClr val="9FC3C8"/>
-                </a:solidFill>
-                <a:latin typeface="Calibri" panose="020F0502020204030204" pitchFamily="34" charset="0"/>
-                <a:ea typeface="Calibri" panose="020F0502020204030204" pitchFamily="34" charset="-122"/>
-                <a:cs typeface="Calibri" panose="020F0502020204030204" pitchFamily="34" charset="-120"/>
-              </a:rPr>
-              <a:t>Customers in the demo dataset</a:t>
-            </a:r>
-            <a:endParaRPr lang="en-US" sz="900" dirty="0"/>
-          </a:p>
-        </p:txBody>
-      </p:sp>
-      <p:sp>
-        <p:nvSpPr>
-          <p:cNvPr id="41" name="Text 35"/>
-          <p:cNvSpPr/>
-          <p:nvPr/>
-        </p:nvSpPr>
-        <p:spPr>
-          <a:xfrm>
-            <a:off x="8846820" y="5852160"/>
-            <a:ext cx="2583180" cy="438912"/>
-          </a:xfrm>
-          <a:prstGeom prst="rect">
-            <a:avLst/>
-          </a:prstGeom>
-          <a:noFill/>
-        </p:spPr>
-        <p:txBody>
-          <a:bodyPr wrap="square" rtlCol="0" anchor="ctr"/>
-          <a:lstStyle/>
-          <a:p>
-            <a:pPr marL="0" indent="0">
-              <a:buNone/>
-            </a:pPr>
-            <a:r>
-              <a:rPr lang="en-US" sz="2200" b="1" dirty="0">
-                <a:solidFill>
-                  <a:srgbClr val="3FD6BE"/>
-                </a:solidFill>
-                <a:latin typeface="Cambria" panose="02040503050406030204" pitchFamily="34" charset="0"/>
-                <a:ea typeface="Cambria" panose="02040503050406030204" pitchFamily="34" charset="-122"/>
-                <a:cs typeface="Cambria" panose="02040503050406030204" pitchFamily="34" charset="-120"/>
-              </a:rPr>
-              <a:t>40%</a:t>
-            </a:r>
-            <a:endParaRPr lang="en-US" sz="2200" dirty="0"/>
-          </a:p>
-        </p:txBody>
-      </p:sp>
-      <p:sp>
-        <p:nvSpPr>
-          <p:cNvPr id="42" name="Text 36"/>
-          <p:cNvSpPr/>
-          <p:nvPr/>
-        </p:nvSpPr>
-        <p:spPr>
-          <a:xfrm>
-            <a:off x="8846820" y="6263640"/>
-            <a:ext cx="2583180" cy="310896"/>
-          </a:xfrm>
-          <a:prstGeom prst="rect">
-            <a:avLst/>
-          </a:prstGeom>
-          <a:noFill/>
-        </p:spPr>
-        <p:txBody>
-          <a:bodyPr wrap="square" rtlCol="0" anchor="ctr"/>
-          <a:lstStyle/>
-          <a:p>
-            <a:pPr marL="0" indent="0">
-              <a:buNone/>
-            </a:pPr>
-            <a:r>
-              <a:rPr lang="en-US" sz="900" dirty="0">
-                <a:solidFill>
-                  <a:srgbClr val="9FC3C8"/>
-                </a:solidFill>
-                <a:latin typeface="Calibri" panose="020F0502020204030204" pitchFamily="34" charset="0"/>
-                <a:ea typeface="Calibri" panose="020F0502020204030204" pitchFamily="34" charset="-122"/>
-                <a:cs typeface="Calibri" panose="020F0502020204030204" pitchFamily="34" charset="-120"/>
-              </a:rPr>
-              <a:t>Of the score is reasoning quality</a:t>
-            </a:r>
-            <a:endParaRPr lang="en-US" sz="900" dirty="0"/>
-          </a:p>
-        </p:txBody>
-      </p:sp>
-      <p:sp>
-        <p:nvSpPr>
-          <p:cNvPr id="43" name="Text 37"/>
-          <p:cNvSpPr/>
-          <p:nvPr/>
-        </p:nvSpPr>
-        <p:spPr>
-          <a:xfrm>
-            <a:off x="457200" y="6492240"/>
-            <a:ext cx="6400800" cy="274320"/>
-          </a:xfrm>
-          <a:prstGeom prst="rect">
-            <a:avLst/>
-          </a:prstGeom>
-          <a:noFill/>
-        </p:spPr>
-        <p:txBody>
-          <a:bodyPr wrap="square" rtlCol="0" anchor="ctr"/>
-          <a:lstStyle/>
-          <a:p>
-            <a:pPr marL="0" indent="0" algn="l">
-              <a:buNone/>
-            </a:pPr>
-            <a:r>
-              <a:rPr lang="en-US" sz="1000" dirty="0">
-                <a:solidFill>
-                  <a:srgbClr val="51707A"/>
-                </a:solidFill>
-                <a:latin typeface="Calibri" panose="020F0502020204030204" pitchFamily="34" charset="0"/>
-                <a:ea typeface="Calibri" panose="020F0502020204030204" pitchFamily="34" charset="-122"/>
-                <a:cs typeface="Calibri" panose="020F0502020204030204" pitchFamily="34" charset="-120"/>
-              </a:rPr>
-              <a:t>Intelligent Customer Signal Detector</a:t>
-            </a:r>
-            <a:endParaRPr lang="en-US" sz="1000" dirty="0"/>
-          </a:p>
-        </p:txBody>
-      </p:sp>
-      <p:sp>
-        <p:nvSpPr>
-          <p:cNvPr id="44" name="Text 38"/>
-          <p:cNvSpPr/>
-          <p:nvPr/>
-        </p:nvSpPr>
-        <p:spPr>
-          <a:xfrm>
-            <a:off x="10820095" y="6492240"/>
-            <a:ext cx="914400" cy="274320"/>
-          </a:xfrm>
-          <a:prstGeom prst="rect">
-            <a:avLst/>
-          </a:prstGeom>
-          <a:noFill/>
-        </p:spPr>
-        <p:txBody>
-          <a:bodyPr wrap="square" rtlCol="0" anchor="ctr"/>
-          <a:lstStyle/>
-          <a:p>
-            <a:pPr marL="0" indent="0" algn="r">
-              <a:buNone/>
-            </a:pPr>
-            <a:r>
-              <a:rPr lang="en-US" sz="1000" dirty="0">
-                <a:solidFill>
-                  <a:srgbClr val="51707A"/>
-                </a:solidFill>
-                <a:latin typeface="Calibri" panose="020F0502020204030204" pitchFamily="34" charset="0"/>
-                <a:ea typeface="Calibri" panose="020F0502020204030204" pitchFamily="34" charset="-122"/>
-                <a:cs typeface="Calibri" panose="020F0502020204030204" pitchFamily="34" charset="-120"/>
-              </a:rPr>
-              <a:t>1 / 5</a:t>
-            </a:r>
-            <a:endParaRPr lang="en-US" sz="1000" dirty="0"/>
-          </a:p>
-        </p:txBody>
-      </p:sp>
       <p:pic>
         <p:nvPicPr>
-          <p:cNvPr id="46" name="Image 1" descr="icons/comment.png"/>
+          <p:cNvPr id="120" name="Image 1" descr="icons/check.png"/>
           <p:cNvPicPr>
             <a:picLocks noChangeAspect="1"/>
           </p:cNvPicPr>
-          <p:nvPr>
-            <p:custDataLst>
-              <p:tags r:id="rId5"/>
-            </p:custDataLst>
-          </p:nvPr>
+          <p:nvPr/>
         </p:nvPicPr>
         <p:blipFill>
-          <a:blip r:embed="rId6"/>
+          <a:blip r:embed="rId2"/>
           <a:stretch>
             <a:fillRect/>
           </a:stretch>
         </p:blipFill>
         <p:spPr>
           <a:xfrm>
-            <a:off x="740664" y="3438144"/>
-            <a:ext cx="219456" cy="219456"/>
+            <a:off x="6547104" y="4626864"/>
+            <a:ext cx="164592" cy="164592"/>
           </a:xfrm>
           <a:prstGeom prst="rect">
             <a:avLst/>
           </a:prstGeom>
         </p:spPr>
       </p:pic>
+      <p:sp>
+        <p:nvSpPr>
+          <p:cNvPr id="121" name="Text 13"/>
+          <p:cNvSpPr/>
+          <p:nvPr/>
+        </p:nvSpPr>
+        <p:spPr>
+          <a:xfrm>
+            <a:off x="6885432" y="4535424"/>
+            <a:ext cx="4343400" cy="347472"/>
+          </a:xfrm>
+          <a:prstGeom prst="rect">
+            <a:avLst/>
+          </a:prstGeom>
+          <a:noFill/>
+        </p:spPr>
+        <p:txBody>
+          <a:bodyPr wrap="square" rtlCol="0" anchor="ctr"/>
+          <a:lstStyle/>
+          <a:p>
+            <a:pPr marL="0" indent="0">
+              <a:buNone/>
+            </a:pPr>
+            <a:r>
+              <a:rPr lang="en-US" sz="1150" dirty="0">
+                <a:solidFill>
+                  <a:srgbClr val="FFFFFF"/>
+                </a:solidFill>
+                <a:latin typeface="Calibri" panose="020F0502020204030204" pitchFamily="34" charset="0"/>
+                <a:ea typeface="Calibri" panose="020F0502020204030204" pitchFamily="34" charset="-122"/>
+                <a:cs typeface="Calibri" panose="020F0502020204030204" pitchFamily="34" charset="-120"/>
+              </a:rPr>
+              <a:t>Prioritised list of at-risk customers, with reasoning</a:t>
+            </a:r>
+            <a:endParaRPr lang="en-US" sz="1150" dirty="0"/>
+          </a:p>
+        </p:txBody>
+      </p:sp>
+      <p:sp>
+        <p:nvSpPr>
+          <p:cNvPr id="122" name="Shape 14"/>
+          <p:cNvSpPr/>
+          <p:nvPr/>
+        </p:nvSpPr>
+        <p:spPr>
+          <a:xfrm>
+            <a:off x="6492240" y="4974336"/>
+            <a:ext cx="274320" cy="274320"/>
+          </a:xfrm>
+          <a:prstGeom prst="roundRect">
+            <a:avLst>
+              <a:gd name="adj" fmla="val 28000"/>
+            </a:avLst>
+          </a:prstGeom>
+          <a:solidFill>
+            <a:srgbClr val="0E7C86"/>
+          </a:solidFill>
+        </p:spPr>
+      </p:sp>
+      <p:pic>
+        <p:nvPicPr>
+          <p:cNvPr id="123" name="Image 2" descr="icons/check.png"/>
+          <p:cNvPicPr>
+            <a:picLocks noChangeAspect="1"/>
+          </p:cNvPicPr>
+          <p:nvPr/>
+        </p:nvPicPr>
+        <p:blipFill>
+          <a:blip r:embed="rId2"/>
+          <a:stretch>
+            <a:fillRect/>
+          </a:stretch>
+        </p:blipFill>
+        <p:spPr>
+          <a:xfrm>
+            <a:off x="6547104" y="5029200"/>
+            <a:ext cx="164592" cy="164592"/>
+          </a:xfrm>
+          <a:prstGeom prst="rect">
+            <a:avLst/>
+          </a:prstGeom>
+        </p:spPr>
+      </p:pic>
+      <p:sp>
+        <p:nvSpPr>
+          <p:cNvPr id="124" name="Text 15"/>
+          <p:cNvSpPr/>
+          <p:nvPr/>
+        </p:nvSpPr>
+        <p:spPr>
+          <a:xfrm>
+            <a:off x="6885432" y="4937760"/>
+            <a:ext cx="4343400" cy="347472"/>
+          </a:xfrm>
+          <a:prstGeom prst="rect">
+            <a:avLst/>
+          </a:prstGeom>
+          <a:noFill/>
+        </p:spPr>
+        <p:txBody>
+          <a:bodyPr wrap="square" rtlCol="0" anchor="ctr"/>
+          <a:lstStyle/>
+          <a:p>
+            <a:pPr marL="0" indent="0">
+              <a:buNone/>
+            </a:pPr>
+            <a:r>
+              <a:rPr lang="en-US" sz="1150" dirty="0">
+                <a:solidFill>
+                  <a:srgbClr val="FFFFFF"/>
+                </a:solidFill>
+                <a:latin typeface="Calibri" panose="020F0502020204030204" pitchFamily="34" charset="0"/>
+                <a:ea typeface="Calibri" panose="020F0502020204030204" pitchFamily="34" charset="-122"/>
+                <a:cs typeface="Calibri" panose="020F0502020204030204" pitchFamily="34" charset="-120"/>
+              </a:rPr>
+              <a:t>Risk / urgency score per customer</a:t>
+            </a:r>
+            <a:endParaRPr lang="en-US" sz="1150" dirty="0"/>
+          </a:p>
+        </p:txBody>
+      </p:sp>
+      <p:sp>
+        <p:nvSpPr>
+          <p:cNvPr id="125" name="Shape 16"/>
+          <p:cNvSpPr/>
+          <p:nvPr/>
+        </p:nvSpPr>
+        <p:spPr>
+          <a:xfrm>
+            <a:off x="6492240" y="5376672"/>
+            <a:ext cx="274320" cy="274320"/>
+          </a:xfrm>
+          <a:prstGeom prst="roundRect">
+            <a:avLst>
+              <a:gd name="adj" fmla="val 28000"/>
+            </a:avLst>
+          </a:prstGeom>
+          <a:solidFill>
+            <a:srgbClr val="0E7C86"/>
+          </a:solidFill>
+        </p:spPr>
+      </p:sp>
+      <p:pic>
+        <p:nvPicPr>
+          <p:cNvPr id="126" name="Image 3" descr="icons/check.png"/>
+          <p:cNvPicPr>
+            <a:picLocks noChangeAspect="1"/>
+          </p:cNvPicPr>
+          <p:nvPr/>
+        </p:nvPicPr>
+        <p:blipFill>
+          <a:blip r:embed="rId2"/>
+          <a:stretch>
+            <a:fillRect/>
+          </a:stretch>
+        </p:blipFill>
+        <p:spPr>
+          <a:xfrm>
+            <a:off x="6547104" y="5431536"/>
+            <a:ext cx="164592" cy="164592"/>
+          </a:xfrm>
+          <a:prstGeom prst="rect">
+            <a:avLst/>
+          </a:prstGeom>
+        </p:spPr>
+      </p:pic>
+      <p:sp>
+        <p:nvSpPr>
+          <p:cNvPr id="127" name="Text 17"/>
+          <p:cNvSpPr/>
+          <p:nvPr/>
+        </p:nvSpPr>
+        <p:spPr>
+          <a:xfrm>
+            <a:off x="6885432" y="5340096"/>
+            <a:ext cx="4343400" cy="347472"/>
+          </a:xfrm>
+          <a:prstGeom prst="rect">
+            <a:avLst/>
+          </a:prstGeom>
+          <a:noFill/>
+        </p:spPr>
+        <p:txBody>
+          <a:bodyPr wrap="square" rtlCol="0" anchor="ctr"/>
+          <a:lstStyle/>
+          <a:p>
+            <a:pPr marL="0" indent="0">
+              <a:buNone/>
+            </a:pPr>
+            <a:r>
+              <a:rPr lang="en-US" sz="1150" dirty="0">
+                <a:solidFill>
+                  <a:srgbClr val="FFFFFF"/>
+                </a:solidFill>
+                <a:latin typeface="Calibri" panose="020F0502020204030204" pitchFamily="34" charset="0"/>
+                <a:ea typeface="Calibri" panose="020F0502020204030204" pitchFamily="34" charset="-122"/>
+                <a:cs typeface="Calibri" panose="020F0502020204030204" pitchFamily="34" charset="-120"/>
+              </a:rPr>
+              <a:t>Brief AI rationale, clear for a retention team</a:t>
+            </a:r>
+            <a:endParaRPr lang="en-US" sz="1150" dirty="0"/>
+          </a:p>
+        </p:txBody>
+      </p:sp>
+      <p:sp>
+        <p:nvSpPr>
+          <p:cNvPr id="128" name="Text 18"/>
+          <p:cNvSpPr/>
+          <p:nvPr/>
+        </p:nvSpPr>
+        <p:spPr>
+          <a:xfrm>
+            <a:off x="640080" y="5806440"/>
+            <a:ext cx="2651760" cy="502920"/>
+          </a:xfrm>
+          <a:prstGeom prst="rect">
+            <a:avLst/>
+          </a:prstGeom>
+          <a:noFill/>
+        </p:spPr>
+        <p:txBody>
+          <a:bodyPr wrap="square" rtlCol="0" anchor="ctr"/>
+          <a:lstStyle/>
+          <a:p>
+            <a:pPr marL="0" indent="0">
+              <a:buNone/>
+            </a:pPr>
+            <a:r>
+              <a:rPr lang="en-US" sz="2600" b="1" dirty="0">
+                <a:solidFill>
+                  <a:srgbClr val="3FD6BE"/>
+                </a:solidFill>
+                <a:latin typeface="Cambria" panose="02040503050406030204" pitchFamily="34" charset="0"/>
+                <a:ea typeface="Cambria" panose="02040503050406030204" pitchFamily="34" charset="-122"/>
+                <a:cs typeface="Cambria" panose="02040503050406030204" pitchFamily="34" charset="-120"/>
+              </a:rPr>
+              <a:t>3 days</a:t>
+            </a:r>
+            <a:endParaRPr lang="en-US" sz="2600" dirty="0"/>
+          </a:p>
+        </p:txBody>
+      </p:sp>
+      <p:sp>
+        <p:nvSpPr>
+          <p:cNvPr id="129" name="Text 19"/>
+          <p:cNvSpPr/>
+          <p:nvPr/>
+        </p:nvSpPr>
+        <p:spPr>
+          <a:xfrm>
+            <a:off x="640080" y="6291072"/>
+            <a:ext cx="2651760" cy="320040"/>
+          </a:xfrm>
+          <a:prstGeom prst="rect">
+            <a:avLst/>
+          </a:prstGeom>
+          <a:noFill/>
+        </p:spPr>
+        <p:txBody>
+          <a:bodyPr wrap="square" rtlCol="0" anchor="ctr"/>
+          <a:lstStyle/>
+          <a:p>
+            <a:pPr marL="0" indent="0">
+              <a:buNone/>
+            </a:pPr>
+            <a:r>
+              <a:rPr lang="en-US" sz="1100" dirty="0">
+                <a:solidFill>
+                  <a:srgbClr val="9FC3C8"/>
+                </a:solidFill>
+                <a:latin typeface="Calibri" panose="020F0502020204030204" pitchFamily="34" charset="0"/>
+                <a:ea typeface="Calibri" panose="020F0502020204030204" pitchFamily="34" charset="-122"/>
+                <a:cs typeface="Calibri" panose="020F0502020204030204" pitchFamily="34" charset="-120"/>
+              </a:rPr>
+              <a:t>build window</a:t>
+            </a:r>
+            <a:endParaRPr lang="en-US" sz="1100" dirty="0"/>
+          </a:p>
+        </p:txBody>
+      </p:sp>
+      <p:sp>
+        <p:nvSpPr>
+          <p:cNvPr id="130" name="Text 20"/>
+          <p:cNvSpPr/>
+          <p:nvPr/>
+        </p:nvSpPr>
+        <p:spPr>
+          <a:xfrm>
+            <a:off x="3520440" y="5806440"/>
+            <a:ext cx="2651760" cy="502920"/>
+          </a:xfrm>
+          <a:prstGeom prst="rect">
+            <a:avLst/>
+          </a:prstGeom>
+          <a:noFill/>
+        </p:spPr>
+        <p:txBody>
+          <a:bodyPr wrap="square" rtlCol="0" anchor="ctr"/>
+          <a:lstStyle/>
+          <a:p>
+            <a:pPr marL="0" indent="0">
+              <a:buNone/>
+            </a:pPr>
+            <a:r>
+              <a:rPr lang="en-US" sz="2600" b="1" dirty="0">
+                <a:solidFill>
+                  <a:srgbClr val="3FD6BE"/>
+                </a:solidFill>
+                <a:latin typeface="Cambria" panose="02040503050406030204" pitchFamily="34" charset="0"/>
+                <a:ea typeface="Cambria" panose="02040503050406030204" pitchFamily="34" charset="-122"/>
+                <a:cs typeface="Cambria" panose="02040503050406030204" pitchFamily="34" charset="-120"/>
+              </a:rPr>
+              <a:t>57</a:t>
+            </a:r>
+            <a:endParaRPr lang="en-US" sz="2600" dirty="0"/>
+          </a:p>
+        </p:txBody>
+      </p:sp>
+      <p:sp>
+        <p:nvSpPr>
+          <p:cNvPr id="131" name="Text 21"/>
+          <p:cNvSpPr/>
+          <p:nvPr/>
+        </p:nvSpPr>
+        <p:spPr>
+          <a:xfrm>
+            <a:off x="3520440" y="6291072"/>
+            <a:ext cx="2651760" cy="320040"/>
+          </a:xfrm>
+          <a:prstGeom prst="rect">
+            <a:avLst/>
+          </a:prstGeom>
+          <a:noFill/>
+        </p:spPr>
+        <p:txBody>
+          <a:bodyPr wrap="square" rtlCol="0" anchor="ctr"/>
+          <a:lstStyle/>
+          <a:p>
+            <a:pPr marL="0" indent="0">
+              <a:buNone/>
+            </a:pPr>
+            <a:r>
+              <a:rPr lang="en-US" sz="1100" dirty="0">
+                <a:solidFill>
+                  <a:srgbClr val="9FC3C8"/>
+                </a:solidFill>
+                <a:latin typeface="Calibri" panose="020F0502020204030204" pitchFamily="34" charset="0"/>
+                <a:ea typeface="Calibri" panose="020F0502020204030204" pitchFamily="34" charset="-122"/>
+                <a:cs typeface="Calibri" panose="020F0502020204030204" pitchFamily="34" charset="-120"/>
+              </a:rPr>
+              <a:t>structured signal fields</a:t>
+            </a:r>
+            <a:endParaRPr lang="en-US" sz="1100" dirty="0"/>
+          </a:p>
+        </p:txBody>
+      </p:sp>
+      <p:sp>
+        <p:nvSpPr>
+          <p:cNvPr id="132" name="Text 22"/>
+          <p:cNvSpPr/>
+          <p:nvPr/>
+        </p:nvSpPr>
+        <p:spPr>
+          <a:xfrm>
+            <a:off x="6400800" y="5806440"/>
+            <a:ext cx="2651760" cy="502920"/>
+          </a:xfrm>
+          <a:prstGeom prst="rect">
+            <a:avLst/>
+          </a:prstGeom>
+          <a:noFill/>
+        </p:spPr>
+        <p:txBody>
+          <a:bodyPr wrap="square" rtlCol="0" anchor="ctr"/>
+          <a:lstStyle/>
+          <a:p>
+            <a:pPr marL="0" indent="0">
+              <a:buNone/>
+            </a:pPr>
+            <a:r>
+              <a:rPr lang="en-US" sz="2600" b="1" dirty="0">
+                <a:solidFill>
+                  <a:srgbClr val="3FD6BE"/>
+                </a:solidFill>
+                <a:latin typeface="Cambria" panose="02040503050406030204" pitchFamily="34" charset="0"/>
+                <a:ea typeface="Cambria" panose="02040503050406030204" pitchFamily="34" charset="-122"/>
+                <a:cs typeface="Cambria" panose="02040503050406030204" pitchFamily="34" charset="-120"/>
+              </a:rPr>
+              <a:t>200</a:t>
+            </a:r>
+            <a:endParaRPr lang="en-US" sz="2600" dirty="0"/>
+          </a:p>
+        </p:txBody>
+      </p:sp>
+      <p:sp>
+        <p:nvSpPr>
+          <p:cNvPr id="133" name="Text 23"/>
+          <p:cNvSpPr/>
+          <p:nvPr/>
+        </p:nvSpPr>
+        <p:spPr>
+          <a:xfrm>
+            <a:off x="6400800" y="6291072"/>
+            <a:ext cx="2651760" cy="320040"/>
+          </a:xfrm>
+          <a:prstGeom prst="rect">
+            <a:avLst/>
+          </a:prstGeom>
+          <a:noFill/>
+        </p:spPr>
+        <p:txBody>
+          <a:bodyPr wrap="square" rtlCol="0" anchor="ctr"/>
+          <a:lstStyle/>
+          <a:p>
+            <a:pPr marL="0" indent="0">
+              <a:buNone/>
+            </a:pPr>
+            <a:r>
+              <a:rPr lang="en-US" sz="1100" dirty="0">
+                <a:solidFill>
+                  <a:srgbClr val="9FC3C8"/>
+                </a:solidFill>
+                <a:latin typeface="Calibri" panose="020F0502020204030204" pitchFamily="34" charset="0"/>
+                <a:ea typeface="Calibri" panose="020F0502020204030204" pitchFamily="34" charset="-122"/>
+                <a:cs typeface="Calibri" panose="020F0502020204030204" pitchFamily="34" charset="-120"/>
+              </a:rPr>
+              <a:t>customers in demo dataset</a:t>
+            </a:r>
+            <a:endParaRPr lang="en-US" sz="1100" dirty="0"/>
+          </a:p>
+        </p:txBody>
+      </p:sp>
+      <p:sp>
+        <p:nvSpPr>
+          <p:cNvPr id="134" name="Text 24"/>
+          <p:cNvSpPr/>
+          <p:nvPr/>
+        </p:nvSpPr>
+        <p:spPr>
+          <a:xfrm>
+            <a:off x="457200" y="6473952"/>
+            <a:ext cx="5486400" cy="274320"/>
+          </a:xfrm>
+          <a:prstGeom prst="rect">
+            <a:avLst/>
+          </a:prstGeom>
+          <a:noFill/>
+        </p:spPr>
+        <p:txBody>
+          <a:bodyPr wrap="square" rtlCol="0" anchor="ctr"/>
+          <a:lstStyle/>
+          <a:p>
+            <a:pPr marL="0" indent="0" algn="l">
+              <a:buNone/>
+            </a:pPr>
+            <a:r>
+              <a:rPr lang="en-US" sz="1000" dirty="0">
+                <a:solidFill>
+                  <a:srgbClr val="51707A"/>
+                </a:solidFill>
+                <a:latin typeface="Calibri" panose="020F0502020204030204" pitchFamily="34" charset="0"/>
+                <a:ea typeface="Calibri" panose="020F0502020204030204" pitchFamily="34" charset="-122"/>
+                <a:cs typeface="Calibri" panose="020F0502020204030204" pitchFamily="34" charset="-120"/>
+              </a:rPr>
+              <a:t>Intelligent Customer Signal Detector</a:t>
+            </a:r>
+            <a:endParaRPr lang="en-US" sz="1000" dirty="0"/>
+          </a:p>
+        </p:txBody>
+      </p:sp>
     </p:spTree>
   </p:cSld>
   <p:clrMapOvr>
@@ -7352,7 +7074,53 @@
                 <a:ea typeface="Calibri" panose="020F0502020204030204" pitchFamily="34" charset="-122"/>
                 <a:cs typeface="Calibri" panose="020F0502020204030204" pitchFamily="34" charset="-120"/>
               </a:rPr>
-              <a:t>Demo link / repository:  [ add before submission ]</a:t>
+              <a:t>Demo link / repository:  [ </a:t>
+            </a:r>
+            <a:r>
+              <a:rPr lang="en-GB" altLang="en-US" sz="1050" dirty="0">
+                <a:solidFill>
+                  <a:srgbClr val="3FD6BE"/>
+                </a:solidFill>
+                <a:latin typeface="Calibri" panose="020F0502020204030204" pitchFamily="34" charset="0"/>
+                <a:ea typeface="Calibri" panose="020F0502020204030204" pitchFamily="34" charset="-122"/>
+                <a:cs typeface="Calibri" panose="020F0502020204030204" pitchFamily="34" charset="-120"/>
+                <a:hlinkClick r:id="rId2" tooltip="" action="ppaction://hlinkfile"/>
+              </a:rPr>
+              <a:t>Demo</a:t>
+            </a:r>
+            <a:r>
+              <a:rPr lang="en-GB" altLang="en-US" sz="1050" dirty="0">
+                <a:solidFill>
+                  <a:srgbClr val="3FD6BE"/>
+                </a:solidFill>
+                <a:latin typeface="Calibri" panose="020F0502020204030204" pitchFamily="34" charset="0"/>
+                <a:ea typeface="Calibri" panose="020F0502020204030204" pitchFamily="34" charset="-122"/>
+                <a:cs typeface="Calibri" panose="020F0502020204030204" pitchFamily="34" charset="-120"/>
+              </a:rPr>
+              <a:t> / </a:t>
+            </a:r>
+            <a:r>
+              <a:rPr lang="en-GB" altLang="en-US" sz="1050" dirty="0">
+                <a:solidFill>
+                  <a:srgbClr val="3FD6BE"/>
+                </a:solidFill>
+                <a:latin typeface="Calibri" panose="020F0502020204030204" pitchFamily="34" charset="0"/>
+                <a:ea typeface="Calibri" panose="020F0502020204030204" pitchFamily="34" charset="-122"/>
+                <a:cs typeface="Calibri" panose="020F0502020204030204" pitchFamily="34" charset="-120"/>
+                <a:hlinkClick r:id="rId3" tooltip="" action="ppaction://hlinkfile"/>
+              </a:rPr>
+              <a:t>CodeBase </a:t>
+            </a:r>
+            <a:r>
+              <a:rPr lang="en-US" sz="1050" dirty="0">
+                <a:solidFill>
+                  <a:srgbClr val="3FD6BE"/>
+                </a:solidFill>
+                <a:latin typeface="Calibri" panose="020F0502020204030204" pitchFamily="34" charset="0"/>
+                <a:ea typeface="Calibri" panose="020F0502020204030204" pitchFamily="34" charset="-122"/>
+                <a:cs typeface="Calibri" panose="020F0502020204030204" pitchFamily="34" charset="-120"/>
+              </a:rPr>
+              <a:t>]</a:t>
             </a:r>
             <a:endParaRPr lang="en-US" sz="1050" dirty="0"/>
           </a:p>
@@ -7441,254 +7209,6 @@
       <p:pic>
         <p:nvPicPr>
           <p:cNvPr id="30" name="Image 6" descr="icons/bulb.png"/>
-          <p:cNvPicPr>
-            <a:picLocks noChangeAspect="1"/>
-          </p:cNvPicPr>
-          <p:nvPr/>
-        </p:nvPicPr>
-        <p:blipFill>
-          <a:blip r:embed="rId2"/>
-          <a:stretch>
-            <a:fillRect/>
-          </a:stretch>
-        </p:blipFill>
-        <p:spPr>
-          <a:xfrm>
-            <a:off x="6620256" y="2139696"/>
-            <a:ext cx="219456" cy="219456"/>
-          </a:xfrm>
-          <a:prstGeom prst="rect">
-            <a:avLst/>
-          </a:prstGeom>
-        </p:spPr>
-      </p:pic>
-      <p:sp>
-        <p:nvSpPr>
-          <p:cNvPr id="31" name="Text 22"/>
-          <p:cNvSpPr/>
-          <p:nvPr/>
-        </p:nvSpPr>
-        <p:spPr>
-          <a:xfrm>
-            <a:off x="7040880" y="2039112"/>
-            <a:ext cx="4480560" cy="292608"/>
-          </a:xfrm>
-          <a:prstGeom prst="rect">
-            <a:avLst/>
-          </a:prstGeom>
-          <a:noFill/>
-        </p:spPr>
-        <p:txBody>
-          <a:bodyPr wrap="square" rtlCol="0" anchor="ctr"/>
-          <a:lstStyle/>
-          <a:p>
-            <a:pPr marL="0" indent="0">
-              <a:buNone/>
-            </a:pPr>
-            <a:r>
-              <a:rPr lang="en-US" sz="1150" b="1" dirty="0">
-                <a:solidFill>
-                  <a:srgbClr val="FFFFFF"/>
-                </a:solidFill>
-                <a:latin typeface="Calibri" panose="020F0502020204030204" pitchFamily="34" charset="0"/>
-                <a:ea typeface="Calibri" panose="020F0502020204030204" pitchFamily="34" charset="-122"/>
-                <a:cs typeface="Calibri" panose="020F0502020204030204" pitchFamily="34" charset="-120"/>
-              </a:rPr>
-              <a:t>Multi-signal correlation</a:t>
-            </a:r>
-            <a:endParaRPr lang="en-US" sz="1150" dirty="0"/>
-          </a:p>
-        </p:txBody>
-      </p:sp>
-      <p:sp>
-        <p:nvSpPr>
-          <p:cNvPr id="32" name="Text 23"/>
-          <p:cNvSpPr/>
-          <p:nvPr/>
-        </p:nvSpPr>
-        <p:spPr>
-          <a:xfrm>
-            <a:off x="7040880" y="2322576"/>
-            <a:ext cx="4480560" cy="420624"/>
-          </a:xfrm>
-          <a:prstGeom prst="rect">
-            <a:avLst/>
-          </a:prstGeom>
-          <a:noFill/>
-        </p:spPr>
-        <p:txBody>
-          <a:bodyPr wrap="square" rtlCol="0" anchor="ctr"/>
-          <a:lstStyle/>
-          <a:p>
-            <a:pPr marL="0" indent="0">
-              <a:lnSpc>
-                <a:spcPct val="115000"/>
-              </a:lnSpc>
-              <a:buNone/>
-            </a:pPr>
-            <a:r>
-              <a:rPr lang="en-US" sz="930" dirty="0">
-                <a:solidFill>
-                  <a:srgbClr val="9FC3C8"/>
-                </a:solidFill>
-                <a:latin typeface="Calibri" panose="020F0502020204030204" pitchFamily="34" charset="0"/>
-                <a:ea typeface="Calibri" panose="020F0502020204030204" pitchFamily="34" charset="-122"/>
-                <a:cs typeface="Calibri" panose="020F0502020204030204" pitchFamily="34" charset="-120"/>
-              </a:rPr>
-              <a:t>Combine sentiment with billing history for a compound risk view (an optional enhancement in the brief).</a:t>
-            </a:r>
-            <a:endParaRPr lang="en-US" sz="930" dirty="0"/>
-          </a:p>
-        </p:txBody>
-      </p:sp>
-      <p:sp>
-        <p:nvSpPr>
-          <p:cNvPr id="33" name="Shape 24"/>
-          <p:cNvSpPr/>
-          <p:nvPr/>
-        </p:nvSpPr>
-        <p:spPr>
-          <a:xfrm>
-            <a:off x="6537960" y="2770632"/>
-            <a:ext cx="384048" cy="384048"/>
-          </a:xfrm>
-          <a:prstGeom prst="roundRect">
-            <a:avLst>
-              <a:gd name="adj" fmla="val 28000"/>
-            </a:avLst>
-          </a:prstGeom>
-          <a:solidFill>
-            <a:srgbClr val="0E7C86"/>
-          </a:solidFill>
-        </p:spPr>
-      </p:sp>
-      <p:pic>
-        <p:nvPicPr>
-          <p:cNvPr id="34" name="Image 7" descr="icons/barchart.png"/>
-          <p:cNvPicPr>
-            <a:picLocks noChangeAspect="1"/>
-          </p:cNvPicPr>
-          <p:nvPr/>
-        </p:nvPicPr>
-        <p:blipFill>
-          <a:blip r:embed="rId3"/>
-          <a:stretch>
-            <a:fillRect/>
-          </a:stretch>
-        </p:blipFill>
-        <p:spPr>
-          <a:xfrm>
-            <a:off x="6620256" y="2852928"/>
-            <a:ext cx="219456" cy="219456"/>
-          </a:xfrm>
-          <a:prstGeom prst="rect">
-            <a:avLst/>
-          </a:prstGeom>
-        </p:spPr>
-      </p:pic>
-      <p:sp>
-        <p:nvSpPr>
-          <p:cNvPr id="35" name="Text 25"/>
-          <p:cNvSpPr/>
-          <p:nvPr/>
-        </p:nvSpPr>
-        <p:spPr>
-          <a:xfrm>
-            <a:off x="7040880" y="2752344"/>
-            <a:ext cx="4480560" cy="292608"/>
-          </a:xfrm>
-          <a:prstGeom prst="rect">
-            <a:avLst/>
-          </a:prstGeom>
-          <a:noFill/>
-        </p:spPr>
-        <p:txBody>
-          <a:bodyPr wrap="square" rtlCol="0" anchor="ctr"/>
-          <a:lstStyle/>
-          <a:p>
-            <a:pPr marL="0" indent="0">
-              <a:buNone/>
-            </a:pPr>
-            <a:r>
-              <a:rPr lang="en-US" sz="1150" b="1" dirty="0">
-                <a:solidFill>
-                  <a:srgbClr val="FFFFFF"/>
-                </a:solidFill>
-                <a:latin typeface="Calibri" panose="020F0502020204030204" pitchFamily="34" charset="0"/>
-                <a:ea typeface="Calibri" panose="020F0502020204030204" pitchFamily="34" charset="-122"/>
-                <a:cs typeface="Calibri" panose="020F0502020204030204" pitchFamily="34" charset="-120"/>
-              </a:rPr>
-              <a:t>Visual risk heatmap</a:t>
-            </a:r>
-            <a:endParaRPr lang="en-US" sz="1150" dirty="0"/>
-          </a:p>
-        </p:txBody>
-      </p:sp>
-      <p:sp>
-        <p:nvSpPr>
-          <p:cNvPr id="36" name="Text 26"/>
-          <p:cNvSpPr/>
-          <p:nvPr/>
-        </p:nvSpPr>
-        <p:spPr>
-          <a:xfrm>
-            <a:off x="7040880" y="3035808"/>
-            <a:ext cx="4480560" cy="420624"/>
-          </a:xfrm>
-          <a:prstGeom prst="rect">
-            <a:avLst/>
-          </a:prstGeom>
-          <a:noFill/>
-        </p:spPr>
-        <p:txBody>
-          <a:bodyPr wrap="square" rtlCol="0" anchor="ctr"/>
-          <a:lstStyle/>
-          <a:p>
-            <a:pPr marL="0" indent="0">
-              <a:lnSpc>
-                <a:spcPct val="115000"/>
-              </a:lnSpc>
-              <a:buNone/>
-            </a:pPr>
-            <a:r>
-              <a:rPr lang="en-US" sz="930" dirty="0">
-                <a:solidFill>
-                  <a:srgbClr val="9FC3C8"/>
-                </a:solidFill>
-                <a:latin typeface="Calibri" panose="020F0502020204030204" pitchFamily="34" charset="0"/>
-                <a:ea typeface="Calibri" panose="020F0502020204030204" pitchFamily="34" charset="-122"/>
-                <a:cs typeface="Calibri" panose="020F0502020204030204" pitchFamily="34" charset="-120"/>
-              </a:rPr>
-              <a:t>Geographic or segment-level view of concentrated churn risk.</a:t>
-            </a:r>
-            <a:endParaRPr lang="en-US" sz="930" dirty="0"/>
-          </a:p>
-        </p:txBody>
-      </p:sp>
-      <p:sp>
-        <p:nvSpPr>
-          <p:cNvPr id="37" name="Shape 27"/>
-          <p:cNvSpPr/>
-          <p:nvPr/>
-        </p:nvSpPr>
-        <p:spPr>
-          <a:xfrm>
-            <a:off x="6537960" y="3483864"/>
-            <a:ext cx="384048" cy="384048"/>
-          </a:xfrm>
-          <a:prstGeom prst="roundRect">
-            <a:avLst>
-              <a:gd name="adj" fmla="val 28000"/>
-            </a:avLst>
-          </a:prstGeom>
-          <a:solidFill>
-            <a:srgbClr val="0E7C86"/>
-          </a:solidFill>
-        </p:spPr>
-      </p:sp>
-      <p:pic>
-        <p:nvPicPr>
-          <p:cNvPr id="38" name="Image 8" descr="icons/route.png"/>
           <p:cNvPicPr>
             <a:picLocks noChangeAspect="1"/>
           </p:cNvPicPr>
@@ -7702,7 +7222,7 @@
         </p:blipFill>
         <p:spPr>
           <a:xfrm>
-            <a:off x="6620256" y="3566160"/>
+            <a:off x="6620256" y="2139696"/>
             <a:ext cx="219456" cy="219456"/>
           </a:xfrm>
           <a:prstGeom prst="rect">
@@ -7712,13 +7232,13 @@
       </p:pic>
       <p:sp>
         <p:nvSpPr>
-          <p:cNvPr id="39" name="Text 28"/>
-          <p:cNvSpPr/>
-          <p:nvPr/>
-        </p:nvSpPr>
-        <p:spPr>
-          <a:xfrm>
-            <a:off x="7040880" y="3465576"/>
+          <p:cNvPr id="31" name="Text 22"/>
+          <p:cNvSpPr/>
+          <p:nvPr/>
+        </p:nvSpPr>
+        <p:spPr>
+          <a:xfrm>
+            <a:off x="7040880" y="2039112"/>
             <a:ext cx="4480560" cy="292608"/>
           </a:xfrm>
           <a:prstGeom prst="rect">
@@ -7742,7 +7262,7 @@
                 <a:ea typeface="Calibri" panose="020F0502020204030204" pitchFamily="34" charset="-122"/>
                 <a:cs typeface="Calibri" panose="020F0502020204030204" pitchFamily="34" charset="-120"/>
               </a:rPr>
-              <a:t>Suggested retention actions</a:t>
+              <a:t>Multi-signal correlation</a:t>
             </a:r>
             <a:endParaRPr lang="en-US" sz="1150" dirty="0"/>
           </a:p>
@@ -7750,13 +7270,13 @@
       </p:sp>
       <p:sp>
         <p:nvSpPr>
-          <p:cNvPr id="40" name="Text 29"/>
-          <p:cNvSpPr/>
-          <p:nvPr/>
-        </p:nvSpPr>
-        <p:spPr>
-          <a:xfrm>
-            <a:off x="7040880" y="3749040"/>
+          <p:cNvPr id="32" name="Text 23"/>
+          <p:cNvSpPr/>
+          <p:nvPr/>
+        </p:nvSpPr>
+        <p:spPr>
+          <a:xfrm>
+            <a:off x="7040880" y="2322576"/>
             <a:ext cx="4480560" cy="420624"/>
           </a:xfrm>
           <a:prstGeom prst="rect">
@@ -7783,7 +7303,7 @@
                 <a:ea typeface="Calibri" panose="020F0502020204030204" pitchFamily="34" charset="-122"/>
                 <a:cs typeface="Calibri" panose="020F0502020204030204" pitchFamily="34" charset="-120"/>
               </a:rPr>
-              <a:t>One recommended next step per flagged customer, ops-reviewable before it's sent.</a:t>
+              <a:t>Combine sentiment with billing history for a compound risk view (an optional enhancement in the brief).</a:t>
             </a:r>
             <a:endParaRPr lang="en-US" sz="930" dirty="0"/>
           </a:p>
@@ -7791,13 +7311,13 @@
       </p:sp>
       <p:sp>
         <p:nvSpPr>
-          <p:cNvPr id="41" name="Shape 30"/>
-          <p:cNvSpPr/>
-          <p:nvPr/>
-        </p:nvSpPr>
-        <p:spPr>
-          <a:xfrm>
-            <a:off x="6537960" y="4197096"/>
+          <p:cNvPr id="33" name="Shape 24"/>
+          <p:cNvSpPr/>
+          <p:nvPr/>
+        </p:nvSpPr>
+        <p:spPr>
+          <a:xfrm>
+            <a:off x="6537960" y="2770632"/>
             <a:ext cx="384048" cy="384048"/>
           </a:xfrm>
           <a:prstGeom prst="roundRect">
@@ -7812,7 +7332,7 @@
       </p:sp>
       <p:pic>
         <p:nvPicPr>
-          <p:cNvPr id="42" name="Image 9" descr="icons/bolt.png"/>
+          <p:cNvPr id="34" name="Image 7" descr="icons/barchart.png"/>
           <p:cNvPicPr>
             <a:picLocks noChangeAspect="1"/>
           </p:cNvPicPr>
@@ -7826,6 +7346,254 @@
         </p:blipFill>
         <p:spPr>
           <a:xfrm>
+            <a:off x="6620256" y="2852928"/>
+            <a:ext cx="219456" cy="219456"/>
+          </a:xfrm>
+          <a:prstGeom prst="rect">
+            <a:avLst/>
+          </a:prstGeom>
+        </p:spPr>
+      </p:pic>
+      <p:sp>
+        <p:nvSpPr>
+          <p:cNvPr id="35" name="Text 25"/>
+          <p:cNvSpPr/>
+          <p:nvPr/>
+        </p:nvSpPr>
+        <p:spPr>
+          <a:xfrm>
+            <a:off x="7040880" y="2752344"/>
+            <a:ext cx="4480560" cy="292608"/>
+          </a:xfrm>
+          <a:prstGeom prst="rect">
+            <a:avLst/>
+          </a:prstGeom>
+          <a:noFill/>
+        </p:spPr>
+        <p:txBody>
+          <a:bodyPr wrap="square" rtlCol="0" anchor="ctr"/>
+          <a:lstStyle/>
+          <a:p>
+            <a:pPr marL="0" indent="0">
+              <a:buNone/>
+            </a:pPr>
+            <a:r>
+              <a:rPr lang="en-US" sz="1150" b="1" dirty="0">
+                <a:solidFill>
+                  <a:srgbClr val="FFFFFF"/>
+                </a:solidFill>
+                <a:latin typeface="Calibri" panose="020F0502020204030204" pitchFamily="34" charset="0"/>
+                <a:ea typeface="Calibri" panose="020F0502020204030204" pitchFamily="34" charset="-122"/>
+                <a:cs typeface="Calibri" panose="020F0502020204030204" pitchFamily="34" charset="-120"/>
+              </a:rPr>
+              <a:t>Visual risk heatmap</a:t>
+            </a:r>
+            <a:endParaRPr lang="en-US" sz="1150" dirty="0"/>
+          </a:p>
+        </p:txBody>
+      </p:sp>
+      <p:sp>
+        <p:nvSpPr>
+          <p:cNvPr id="36" name="Text 26"/>
+          <p:cNvSpPr/>
+          <p:nvPr/>
+        </p:nvSpPr>
+        <p:spPr>
+          <a:xfrm>
+            <a:off x="7040880" y="3035808"/>
+            <a:ext cx="4480560" cy="420624"/>
+          </a:xfrm>
+          <a:prstGeom prst="rect">
+            <a:avLst/>
+          </a:prstGeom>
+          <a:noFill/>
+        </p:spPr>
+        <p:txBody>
+          <a:bodyPr wrap="square" rtlCol="0" anchor="ctr"/>
+          <a:lstStyle/>
+          <a:p>
+            <a:pPr marL="0" indent="0">
+              <a:lnSpc>
+                <a:spcPct val="115000"/>
+              </a:lnSpc>
+              <a:buNone/>
+            </a:pPr>
+            <a:r>
+              <a:rPr lang="en-US" sz="930" dirty="0">
+                <a:solidFill>
+                  <a:srgbClr val="9FC3C8"/>
+                </a:solidFill>
+                <a:latin typeface="Calibri" panose="020F0502020204030204" pitchFamily="34" charset="0"/>
+                <a:ea typeface="Calibri" panose="020F0502020204030204" pitchFamily="34" charset="-122"/>
+                <a:cs typeface="Calibri" panose="020F0502020204030204" pitchFamily="34" charset="-120"/>
+              </a:rPr>
+              <a:t>Geographic or segment-level view of concentrated churn risk.</a:t>
+            </a:r>
+            <a:endParaRPr lang="en-US" sz="930" dirty="0"/>
+          </a:p>
+        </p:txBody>
+      </p:sp>
+      <p:sp>
+        <p:nvSpPr>
+          <p:cNvPr id="37" name="Shape 27"/>
+          <p:cNvSpPr/>
+          <p:nvPr/>
+        </p:nvSpPr>
+        <p:spPr>
+          <a:xfrm>
+            <a:off x="6537960" y="3483864"/>
+            <a:ext cx="384048" cy="384048"/>
+          </a:xfrm>
+          <a:prstGeom prst="roundRect">
+            <a:avLst>
+              <a:gd name="adj" fmla="val 28000"/>
+            </a:avLst>
+          </a:prstGeom>
+          <a:solidFill>
+            <a:srgbClr val="0E7C86"/>
+          </a:solidFill>
+        </p:spPr>
+      </p:sp>
+      <p:pic>
+        <p:nvPicPr>
+          <p:cNvPr id="38" name="Image 8" descr="icons/route.png"/>
+          <p:cNvPicPr>
+            <a:picLocks noChangeAspect="1"/>
+          </p:cNvPicPr>
+          <p:nvPr/>
+        </p:nvPicPr>
+        <p:blipFill>
+          <a:blip r:embed="rId6"/>
+          <a:stretch>
+            <a:fillRect/>
+          </a:stretch>
+        </p:blipFill>
+        <p:spPr>
+          <a:xfrm>
+            <a:off x="6620256" y="3566160"/>
+            <a:ext cx="219456" cy="219456"/>
+          </a:xfrm>
+          <a:prstGeom prst="rect">
+            <a:avLst/>
+          </a:prstGeom>
+        </p:spPr>
+      </p:pic>
+      <p:sp>
+        <p:nvSpPr>
+          <p:cNvPr id="39" name="Text 28"/>
+          <p:cNvSpPr/>
+          <p:nvPr/>
+        </p:nvSpPr>
+        <p:spPr>
+          <a:xfrm>
+            <a:off x="7040880" y="3465576"/>
+            <a:ext cx="4480560" cy="292608"/>
+          </a:xfrm>
+          <a:prstGeom prst="rect">
+            <a:avLst/>
+          </a:prstGeom>
+          <a:noFill/>
+        </p:spPr>
+        <p:txBody>
+          <a:bodyPr wrap="square" rtlCol="0" anchor="ctr"/>
+          <a:lstStyle/>
+          <a:p>
+            <a:pPr marL="0" indent="0">
+              <a:buNone/>
+            </a:pPr>
+            <a:r>
+              <a:rPr lang="en-US" sz="1150" b="1" dirty="0">
+                <a:solidFill>
+                  <a:srgbClr val="FFFFFF"/>
+                </a:solidFill>
+                <a:latin typeface="Calibri" panose="020F0502020204030204" pitchFamily="34" charset="0"/>
+                <a:ea typeface="Calibri" panose="020F0502020204030204" pitchFamily="34" charset="-122"/>
+                <a:cs typeface="Calibri" panose="020F0502020204030204" pitchFamily="34" charset="-120"/>
+              </a:rPr>
+              <a:t>Suggested retention actions</a:t>
+            </a:r>
+            <a:endParaRPr lang="en-US" sz="1150" dirty="0"/>
+          </a:p>
+        </p:txBody>
+      </p:sp>
+      <p:sp>
+        <p:nvSpPr>
+          <p:cNvPr id="40" name="Text 29"/>
+          <p:cNvSpPr/>
+          <p:nvPr/>
+        </p:nvSpPr>
+        <p:spPr>
+          <a:xfrm>
+            <a:off x="7040880" y="3749040"/>
+            <a:ext cx="4480560" cy="420624"/>
+          </a:xfrm>
+          <a:prstGeom prst="rect">
+            <a:avLst/>
+          </a:prstGeom>
+          <a:noFill/>
+        </p:spPr>
+        <p:txBody>
+          <a:bodyPr wrap="square" rtlCol="0" anchor="ctr"/>
+          <a:lstStyle/>
+          <a:p>
+            <a:pPr marL="0" indent="0">
+              <a:lnSpc>
+                <a:spcPct val="115000"/>
+              </a:lnSpc>
+              <a:buNone/>
+            </a:pPr>
+            <a:r>
+              <a:rPr lang="en-US" sz="930" dirty="0">
+                <a:solidFill>
+                  <a:srgbClr val="9FC3C8"/>
+                </a:solidFill>
+                <a:latin typeface="Calibri" panose="020F0502020204030204" pitchFamily="34" charset="0"/>
+                <a:ea typeface="Calibri" panose="020F0502020204030204" pitchFamily="34" charset="-122"/>
+                <a:cs typeface="Calibri" panose="020F0502020204030204" pitchFamily="34" charset="-120"/>
+              </a:rPr>
+              <a:t>One recommended next step per flagged customer, ops-reviewable before it's sent.</a:t>
+            </a:r>
+            <a:endParaRPr lang="en-US" sz="930" dirty="0"/>
+          </a:p>
+        </p:txBody>
+      </p:sp>
+      <p:sp>
+        <p:nvSpPr>
+          <p:cNvPr id="41" name="Shape 30"/>
+          <p:cNvSpPr/>
+          <p:nvPr/>
+        </p:nvSpPr>
+        <p:spPr>
+          <a:xfrm>
+            <a:off x="6537960" y="4197096"/>
+            <a:ext cx="384048" cy="384048"/>
+          </a:xfrm>
+          <a:prstGeom prst="roundRect">
+            <a:avLst>
+              <a:gd name="adj" fmla="val 28000"/>
+            </a:avLst>
+          </a:prstGeom>
+          <a:solidFill>
+            <a:srgbClr val="0E7C86"/>
+          </a:solidFill>
+        </p:spPr>
+      </p:sp>
+      <p:pic>
+        <p:nvPicPr>
+          <p:cNvPr id="42" name="Image 9" descr="icons/bolt.png"/>
+          <p:cNvPicPr>
+            <a:picLocks noChangeAspect="1"/>
+          </p:cNvPicPr>
+          <p:nvPr/>
+        </p:nvPicPr>
+        <p:blipFill>
+          <a:blip r:embed="rId7"/>
+          <a:stretch>
+            <a:fillRect/>
+          </a:stretch>
+        </p:blipFill>
+        <p:spPr>
+          <a:xfrm>
             <a:off x="6620256" y="4279392"/>
             <a:ext cx="219456" cy="219456"/>
           </a:xfrm>
@@ -7943,7 +7711,7 @@
           <p:nvPr/>
         </p:nvPicPr>
         <p:blipFill>
-          <a:blip r:embed="rId6"/>
+          <a:blip r:embed="rId8"/>
           <a:stretch>
             <a:fillRect/>
           </a:stretch>
@@ -8189,7 +7957,7 @@
 
 <file path=ppt/tags/tag2.xml><?xml version="1.0" encoding="utf-8"?>
 <p:tagLst xmlns:p="http://schemas.openxmlformats.org/presentationml/2006/main">
-  <p:tag name="KSO_WM_DIAGRAM_VIRTUALLY_FRAME" val="{&quot;height&quot;:234.35999999999999,&quot;left&quot;:43.2,&quot;top&quot;:144,&quot;width&quot;:781.2}"/>
+  <p:tag name="KSO_WM_DIAGRAM_VIRTUALLY_FRAME" val="{&quot;height&quot;:329.76000000000005,&quot;left&quot;:43.2,&quot;top&quot;:133.2,&quot;width&quot;:828.72}"/>
 </p:tagLst>
 </file>
 
@@ -8273,7 +8041,7 @@
 
 <file path=ppt/tags/tag32.xml><?xml version="1.0" encoding="utf-8"?>
 <p:tagLst xmlns:p="http://schemas.openxmlformats.org/presentationml/2006/main">
-  <p:tag name="KSO_WM_DIAGRAM_VIRTUALLY_FRAME" val="{&quot;height&quot;:329.76000000000005,&quot;left&quot;:43.2,&quot;top&quot;:133.2,&quot;width&quot;:828.72}"/>
+  <p:tag name="KSO_WM_DIAGRAM_VIRTUALLY_FRAME" val="{&quot;height&quot;:368.64,&quot;left&quot;:43.2,&quot;top&quot;:126,&quot;width&quot;:860.4}"/>
 </p:tagLst>
 </file>
 
@@ -8422,12 +8190,6 @@
 </file>
 
 <file path=ppt/tags/tag55.xml><?xml version="1.0" encoding="utf-8"?>
-<p:tagLst xmlns:p="http://schemas.openxmlformats.org/presentationml/2006/main">
-  <p:tag name="KSO_WM_DIAGRAM_VIRTUALLY_FRAME" val="{&quot;height&quot;:368.64,&quot;left&quot;:43.2,&quot;top&quot;:126,&quot;width&quot;:860.4}"/>
-</p:tagLst>
-</file>
-
-<file path=ppt/tags/tag56.xml><?xml version="1.0" encoding="utf-8"?>
 <p:tagLst xmlns:p="http://schemas.openxmlformats.org/presentationml/2006/main">
   <p:tag name="KSO_WM_DIAGRAM_VIRTUALLY_FRAME" val="{&quot;height&quot;:368.64,&quot;left&quot;:43.2,&quot;top&quot;:126,&quot;width&quot;:860.4}"/>
 </p:tagLst>
